--- a/presentation/AI활용_국회질의서_자동화_발표자료.pptx
+++ b/presentation/AI활용_국회질의서_자동화_발표자료.pptx
@@ -4,9 +4,6 @@
   <p:sldMasterIdLst>
     <p:sldMasterId id="2147483648" r:id="rId1"/>
   </p:sldMasterIdLst>
-  <p:notesMasterIdLst>
-    <p:notesMasterId r:id="rId9"/>
-  </p:notesMasterIdLst>
   <p:sldIdLst>
     <p:sldId id="256" r:id="rId2"/>
     <p:sldId id="257" r:id="rId3"/>
@@ -14,8 +11,12 @@
     <p:sldId id="259" r:id="rId5"/>
     <p:sldId id="260" r:id="rId6"/>
     <p:sldId id="261" r:id="rId7"/>
-    <p:sldId id="263" r:id="rId8"/>
+    <p:sldId id="262" r:id="rId8"/>
+    <p:sldId id="263" r:id="rId9"/>
   </p:sldIdLst>
+  <p:notesMasterIdLst>
+    <p:notesMasterId r:id="rId10"/>
+  </p:notesMasterIdLst>
   <p:sldSz cx="12192000" cy="6858000"/>
   <p:notesSz cx="6858000" cy="12192000"/>
   <p:defaultTextStyle>
@@ -110,337 +111,7 @@
       </a:defRPr>
     </a:lvl9pPr>
   </p:defaultTextStyle>
-  <p:extLst>
-    <p:ext uri="{EFAFB233-063F-42B5-8137-9DF3F51BA10A}">
-      <p15:sldGuideLst xmlns:p15="http://schemas.microsoft.com/office/powerpoint/2012/main"/>
-    </p:ext>
-  </p:extLst>
 </p:presentation>
-</file>
-
-<file path=ppt/revisionInfo.xml><?xml version="1.0" encoding="utf-8"?>
-<p1510:revInfo xmlns:a="http://schemas.openxmlformats.org/drawingml/2006/main" xmlns:r="http://schemas.openxmlformats.org/officeDocument/2006/relationships" xmlns:p1510="http://schemas.microsoft.com/office/powerpoint/2015/10/main">
-  <p1510:revLst>
-    <p1510:client id="{38E154DF-A50D-4101-A208-21EA24BDB741}" v="5" dt="2026-08-03T12:39:13.112"/>
-  </p1510:revLst>
-</p1510:revInfo>
-</file>
-
-<file path=ppt/changesInfos/changesInfo1.xml><?xml version="1.0" encoding="utf-8"?>
-<pc:chgInfo xmlns:a="http://schemas.openxmlformats.org/drawingml/2006/main" xmlns:r="http://schemas.openxmlformats.org/officeDocument/2006/relationships" xmlns:ac="http://schemas.microsoft.com/office/drawing/2013/main/command" xmlns:pc="http://schemas.microsoft.com/office/powerpoint/2013/main/command">
-  <pc:docChgLst>
-    <pc:chgData name="윤서 김" userId="e850ce3416cb5bf2" providerId="LiveId" clId="{B3443B13-289E-406C-B0CA-A7E22F7EE38F}"/>
-    <pc:docChg chg="undo custSel addSld delSld modSld">
-      <pc:chgData name="윤서 김" userId="e850ce3416cb5bf2" providerId="LiveId" clId="{B3443B13-289E-406C-B0CA-A7E22F7EE38F}" dt="2026-08-03T12:41:32.429" v="366" actId="20577"/>
-      <pc:docMkLst>
-        <pc:docMk/>
-      </pc:docMkLst>
-      <pc:sldChg chg="delSp modSp mod">
-        <pc:chgData name="윤서 김" userId="e850ce3416cb5bf2" providerId="LiveId" clId="{B3443B13-289E-406C-B0CA-A7E22F7EE38F}" dt="2026-08-03T12:40:19.629" v="337" actId="1037"/>
-        <pc:sldMkLst>
-          <pc:docMk/>
-          <pc:sldMk cId="0" sldId="257"/>
-        </pc:sldMkLst>
-        <pc:spChg chg="mod">
-          <ac:chgData name="윤서 김" userId="e850ce3416cb5bf2" providerId="LiveId" clId="{B3443B13-289E-406C-B0CA-A7E22F7EE38F}" dt="2026-08-03T12:40:19.629" v="337" actId="1037"/>
-          <ac:spMkLst>
-            <pc:docMk/>
-            <pc:sldMk cId="0" sldId="257"/>
-            <ac:spMk id="16" creationId="{00000000-0000-0000-0000-000000000000}"/>
-          </ac:spMkLst>
-        </pc:spChg>
-        <pc:spChg chg="del">
-          <ac:chgData name="윤서 김" userId="e850ce3416cb5bf2" providerId="LiveId" clId="{B3443B13-289E-406C-B0CA-A7E22F7EE38F}" dt="2026-08-03T12:34:54.614" v="190" actId="478"/>
-          <ac:spMkLst>
-            <pc:docMk/>
-            <pc:sldMk cId="0" sldId="257"/>
-            <ac:spMk id="17" creationId="{00000000-0000-0000-0000-000000000000}"/>
-          </ac:spMkLst>
-        </pc:spChg>
-        <pc:spChg chg="mod">
-          <ac:chgData name="윤서 김" userId="e850ce3416cb5bf2" providerId="LiveId" clId="{B3443B13-289E-406C-B0CA-A7E22F7EE38F}" dt="2026-08-03T12:40:13.137" v="323" actId="6549"/>
-          <ac:spMkLst>
-            <pc:docMk/>
-            <pc:sldMk cId="0" sldId="257"/>
-            <ac:spMk id="18" creationId="{00000000-0000-0000-0000-000000000000}"/>
-          </ac:spMkLst>
-        </pc:spChg>
-        <pc:spChg chg="del">
-          <ac:chgData name="윤서 김" userId="e850ce3416cb5bf2" providerId="LiveId" clId="{B3443B13-289E-406C-B0CA-A7E22F7EE38F}" dt="2026-08-03T12:35:23.801" v="236" actId="478"/>
-          <ac:spMkLst>
-            <pc:docMk/>
-            <pc:sldMk cId="0" sldId="257"/>
-            <ac:spMk id="19" creationId="{00000000-0000-0000-0000-000000000000}"/>
-          </ac:spMkLst>
-        </pc:spChg>
-      </pc:sldChg>
-      <pc:sldChg chg="delSp mod">
-        <pc:chgData name="윤서 김" userId="e850ce3416cb5bf2" providerId="LiveId" clId="{B3443B13-289E-406C-B0CA-A7E22F7EE38F}" dt="2026-08-03T12:34:42.880" v="189" actId="478"/>
-        <pc:sldMkLst>
-          <pc:docMk/>
-          <pc:sldMk cId="0" sldId="258"/>
-        </pc:sldMkLst>
-        <pc:spChg chg="del">
-          <ac:chgData name="윤서 김" userId="e850ce3416cb5bf2" providerId="LiveId" clId="{B3443B13-289E-406C-B0CA-A7E22F7EE38F}" dt="2026-08-03T12:34:42.880" v="189" actId="478"/>
-          <ac:spMkLst>
-            <pc:docMk/>
-            <pc:sldMk cId="0" sldId="258"/>
-            <ac:spMk id="31" creationId="{00000000-0000-0000-0000-000000000000}"/>
-          </ac:spMkLst>
-        </pc:spChg>
-      </pc:sldChg>
-      <pc:sldChg chg="delSp modSp mod">
-        <pc:chgData name="윤서 김" userId="e850ce3416cb5bf2" providerId="LiveId" clId="{B3443B13-289E-406C-B0CA-A7E22F7EE38F}" dt="2026-08-03T12:34:34.400" v="188" actId="1035"/>
-        <pc:sldMkLst>
-          <pc:docMk/>
-          <pc:sldMk cId="0" sldId="259"/>
-        </pc:sldMkLst>
-        <pc:spChg chg="del">
-          <ac:chgData name="윤서 김" userId="e850ce3416cb5bf2" providerId="LiveId" clId="{B3443B13-289E-406C-B0CA-A7E22F7EE38F}" dt="2026-08-03T12:27:14.461" v="0" actId="478"/>
-          <ac:spMkLst>
-            <pc:docMk/>
-            <pc:sldMk cId="0" sldId="259"/>
-            <ac:spMk id="3" creationId="{00000000-0000-0000-0000-000000000000}"/>
-          </ac:spMkLst>
-        </pc:spChg>
-        <pc:spChg chg="mod">
-          <ac:chgData name="윤서 김" userId="e850ce3416cb5bf2" providerId="LiveId" clId="{B3443B13-289E-406C-B0CA-A7E22F7EE38F}" dt="2026-08-03T12:27:23.741" v="17" actId="1036"/>
-          <ac:spMkLst>
-            <pc:docMk/>
-            <pc:sldMk cId="0" sldId="259"/>
-            <ac:spMk id="9" creationId="{00000000-0000-0000-0000-000000000000}"/>
-          </ac:spMkLst>
-        </pc:spChg>
-        <pc:spChg chg="mod">
-          <ac:chgData name="윤서 김" userId="e850ce3416cb5bf2" providerId="LiveId" clId="{B3443B13-289E-406C-B0CA-A7E22F7EE38F}" dt="2026-08-03T12:27:37.084" v="24" actId="1035"/>
-          <ac:spMkLst>
-            <pc:docMk/>
-            <pc:sldMk cId="0" sldId="259"/>
-            <ac:spMk id="11" creationId="{00000000-0000-0000-0000-000000000000}"/>
-          </ac:spMkLst>
-        </pc:spChg>
-        <pc:spChg chg="mod">
-          <ac:chgData name="윤서 김" userId="e850ce3416cb5bf2" providerId="LiveId" clId="{B3443B13-289E-406C-B0CA-A7E22F7EE38F}" dt="2026-08-03T12:27:47.678" v="44" actId="1035"/>
-          <ac:spMkLst>
-            <pc:docMk/>
-            <pc:sldMk cId="0" sldId="259"/>
-            <ac:spMk id="13" creationId="{00000000-0000-0000-0000-000000000000}"/>
-          </ac:spMkLst>
-        </pc:spChg>
-        <pc:spChg chg="mod">
-          <ac:chgData name="윤서 김" userId="e850ce3416cb5bf2" providerId="LiveId" clId="{B3443B13-289E-406C-B0CA-A7E22F7EE38F}" dt="2026-08-03T12:28:02.727" v="64" actId="1035"/>
-          <ac:spMkLst>
-            <pc:docMk/>
-            <pc:sldMk cId="0" sldId="259"/>
-            <ac:spMk id="19" creationId="{00000000-0000-0000-0000-000000000000}"/>
-          </ac:spMkLst>
-        </pc:spChg>
-        <pc:spChg chg="mod">
-          <ac:chgData name="윤서 김" userId="e850ce3416cb5bf2" providerId="LiveId" clId="{B3443B13-289E-406C-B0CA-A7E22F7EE38F}" dt="2026-08-03T12:28:02.727" v="64" actId="1035"/>
-          <ac:spMkLst>
-            <pc:docMk/>
-            <pc:sldMk cId="0" sldId="259"/>
-            <ac:spMk id="21" creationId="{00000000-0000-0000-0000-000000000000}"/>
-          </ac:spMkLst>
-        </pc:spChg>
-        <pc:spChg chg="mod">
-          <ac:chgData name="윤서 김" userId="e850ce3416cb5bf2" providerId="LiveId" clId="{B3443B13-289E-406C-B0CA-A7E22F7EE38F}" dt="2026-08-03T12:34:34.400" v="188" actId="1035"/>
-          <ac:spMkLst>
-            <pc:docMk/>
-            <pc:sldMk cId="0" sldId="259"/>
-            <ac:spMk id="23" creationId="{00000000-0000-0000-0000-000000000000}"/>
-          </ac:spMkLst>
-        </pc:spChg>
-      </pc:sldChg>
-      <pc:sldChg chg="modSp mod">
-        <pc:chgData name="윤서 김" userId="e850ce3416cb5bf2" providerId="LiveId" clId="{B3443B13-289E-406C-B0CA-A7E22F7EE38F}" dt="2026-08-03T12:37:56.282" v="298" actId="255"/>
-        <pc:sldMkLst>
-          <pc:docMk/>
-          <pc:sldMk cId="0" sldId="260"/>
-        </pc:sldMkLst>
-        <pc:spChg chg="mod">
-          <ac:chgData name="윤서 김" userId="e850ce3416cb5bf2" providerId="LiveId" clId="{B3443B13-289E-406C-B0CA-A7E22F7EE38F}" dt="2026-08-03T12:37:56.282" v="298" actId="255"/>
-          <ac:spMkLst>
-            <pc:docMk/>
-            <pc:sldMk cId="0" sldId="260"/>
-            <ac:spMk id="8" creationId="{00000000-0000-0000-0000-000000000000}"/>
-          </ac:spMkLst>
-        </pc:spChg>
-        <pc:spChg chg="mod">
-          <ac:chgData name="윤서 김" userId="e850ce3416cb5bf2" providerId="LiveId" clId="{B3443B13-289E-406C-B0CA-A7E22F7EE38F}" dt="2026-08-03T12:37:56.282" v="298" actId="255"/>
-          <ac:spMkLst>
-            <pc:docMk/>
-            <pc:sldMk cId="0" sldId="260"/>
-            <ac:spMk id="13" creationId="{00000000-0000-0000-0000-000000000000}"/>
-          </ac:spMkLst>
-        </pc:spChg>
-        <pc:spChg chg="mod">
-          <ac:chgData name="윤서 김" userId="e850ce3416cb5bf2" providerId="LiveId" clId="{B3443B13-289E-406C-B0CA-A7E22F7EE38F}" dt="2026-08-03T12:37:56.282" v="298" actId="255"/>
-          <ac:spMkLst>
-            <pc:docMk/>
-            <pc:sldMk cId="0" sldId="260"/>
-            <ac:spMk id="18" creationId="{00000000-0000-0000-0000-000000000000}"/>
-          </ac:spMkLst>
-        </pc:spChg>
-        <pc:spChg chg="mod">
-          <ac:chgData name="윤서 김" userId="e850ce3416cb5bf2" providerId="LiveId" clId="{B3443B13-289E-406C-B0CA-A7E22F7EE38F}" dt="2026-08-03T12:37:56.282" v="298" actId="255"/>
-          <ac:spMkLst>
-            <pc:docMk/>
-            <pc:sldMk cId="0" sldId="260"/>
-            <ac:spMk id="23" creationId="{00000000-0000-0000-0000-000000000000}"/>
-          </ac:spMkLst>
-        </pc:spChg>
-        <pc:spChg chg="mod">
-          <ac:chgData name="윤서 김" userId="e850ce3416cb5bf2" providerId="LiveId" clId="{B3443B13-289E-406C-B0CA-A7E22F7EE38F}" dt="2026-08-03T12:37:56.282" v="298" actId="255"/>
-          <ac:spMkLst>
-            <pc:docMk/>
-            <pc:sldMk cId="0" sldId="260"/>
-            <ac:spMk id="28" creationId="{00000000-0000-0000-0000-000000000000}"/>
-          </ac:spMkLst>
-        </pc:spChg>
-        <pc:spChg chg="mod">
-          <ac:chgData name="윤서 김" userId="e850ce3416cb5bf2" providerId="LiveId" clId="{B3443B13-289E-406C-B0CA-A7E22F7EE38F}" dt="2026-08-03T12:37:56.282" v="298" actId="255"/>
-          <ac:spMkLst>
-            <pc:docMk/>
-            <pc:sldMk cId="0" sldId="260"/>
-            <ac:spMk id="33" creationId="{00000000-0000-0000-0000-000000000000}"/>
-          </ac:spMkLst>
-        </pc:spChg>
-      </pc:sldChg>
-      <pc:sldChg chg="modSp mod">
-        <pc:chgData name="윤서 김" userId="e850ce3416cb5bf2" providerId="LiveId" clId="{B3443B13-289E-406C-B0CA-A7E22F7EE38F}" dt="2026-08-03T12:37:37.409" v="297" actId="255"/>
-        <pc:sldMkLst>
-          <pc:docMk/>
-          <pc:sldMk cId="0" sldId="261"/>
-        </pc:sldMkLst>
-        <pc:spChg chg="mod">
-          <ac:chgData name="윤서 김" userId="e850ce3416cb5bf2" providerId="LiveId" clId="{B3443B13-289E-406C-B0CA-A7E22F7EE38F}" dt="2026-08-03T12:37:37.409" v="297" actId="255"/>
-          <ac:spMkLst>
-            <pc:docMk/>
-            <pc:sldMk cId="0" sldId="261"/>
-            <ac:spMk id="13" creationId="{00000000-0000-0000-0000-000000000000}"/>
-          </ac:spMkLst>
-        </pc:spChg>
-        <pc:spChg chg="mod">
-          <ac:chgData name="윤서 김" userId="e850ce3416cb5bf2" providerId="LiveId" clId="{B3443B13-289E-406C-B0CA-A7E22F7EE38F}" dt="2026-08-03T12:37:37.409" v="297" actId="255"/>
-          <ac:spMkLst>
-            <pc:docMk/>
-            <pc:sldMk cId="0" sldId="261"/>
-            <ac:spMk id="15" creationId="{00000000-0000-0000-0000-000000000000}"/>
-          </ac:spMkLst>
-        </pc:spChg>
-        <pc:spChg chg="mod">
-          <ac:chgData name="윤서 김" userId="e850ce3416cb5bf2" providerId="LiveId" clId="{B3443B13-289E-406C-B0CA-A7E22F7EE38F}" dt="2026-08-03T12:37:37.409" v="297" actId="255"/>
-          <ac:spMkLst>
-            <pc:docMk/>
-            <pc:sldMk cId="0" sldId="261"/>
-            <ac:spMk id="17" creationId="{00000000-0000-0000-0000-000000000000}"/>
-          </ac:spMkLst>
-        </pc:spChg>
-        <pc:spChg chg="mod">
-          <ac:chgData name="윤서 김" userId="e850ce3416cb5bf2" providerId="LiveId" clId="{B3443B13-289E-406C-B0CA-A7E22F7EE38F}" dt="2026-08-03T12:37:37.409" v="297" actId="255"/>
-          <ac:spMkLst>
-            <pc:docMk/>
-            <pc:sldMk cId="0" sldId="261"/>
-            <ac:spMk id="19" creationId="{00000000-0000-0000-0000-000000000000}"/>
-          </ac:spMkLst>
-        </pc:spChg>
-        <pc:spChg chg="mod">
-          <ac:chgData name="윤서 김" userId="e850ce3416cb5bf2" providerId="LiveId" clId="{B3443B13-289E-406C-B0CA-A7E22F7EE38F}" dt="2026-08-03T12:37:37.409" v="297" actId="255"/>
-          <ac:spMkLst>
-            <pc:docMk/>
-            <pc:sldMk cId="0" sldId="261"/>
-            <ac:spMk id="21" creationId="{00000000-0000-0000-0000-000000000000}"/>
-          </ac:spMkLst>
-        </pc:spChg>
-      </pc:sldChg>
-      <pc:sldChg chg="del">
-        <pc:chgData name="윤서 김" userId="e850ce3416cb5bf2" providerId="LiveId" clId="{B3443B13-289E-406C-B0CA-A7E22F7EE38F}" dt="2026-08-03T12:32:07.695" v="99" actId="47"/>
-        <pc:sldMkLst>
-          <pc:docMk/>
-          <pc:sldMk cId="0" sldId="262"/>
-        </pc:sldMkLst>
-      </pc:sldChg>
-      <pc:sldChg chg="delSp modSp mod">
-        <pc:chgData name="윤서 김" userId="e850ce3416cb5bf2" providerId="LiveId" clId="{B3443B13-289E-406C-B0CA-A7E22F7EE38F}" dt="2026-08-03T12:41:32.429" v="366" actId="20577"/>
-        <pc:sldMkLst>
-          <pc:docMk/>
-          <pc:sldMk cId="0" sldId="263"/>
-        </pc:sldMkLst>
-        <pc:spChg chg="del">
-          <ac:chgData name="윤서 김" userId="e850ce3416cb5bf2" providerId="LiveId" clId="{B3443B13-289E-406C-B0CA-A7E22F7EE38F}" dt="2026-08-03T12:33:25.734" v="105" actId="478"/>
-          <ac:spMkLst>
-            <pc:docMk/>
-            <pc:sldMk cId="0" sldId="263"/>
-            <ac:spMk id="7" creationId="{00000000-0000-0000-0000-000000000000}"/>
-          </ac:spMkLst>
-        </pc:spChg>
-        <pc:spChg chg="mod">
-          <ac:chgData name="윤서 김" userId="e850ce3416cb5bf2" providerId="LiveId" clId="{B3443B13-289E-406C-B0CA-A7E22F7EE38F}" dt="2026-08-03T12:37:17.106" v="296" actId="255"/>
-          <ac:spMkLst>
-            <pc:docMk/>
-            <pc:sldMk cId="0" sldId="263"/>
-            <ac:spMk id="8" creationId="{00000000-0000-0000-0000-000000000000}"/>
-          </ac:spMkLst>
-        </pc:spChg>
-        <pc:spChg chg="del">
-          <ac:chgData name="윤서 김" userId="e850ce3416cb5bf2" providerId="LiveId" clId="{B3443B13-289E-406C-B0CA-A7E22F7EE38F}" dt="2026-08-03T12:33:35.157" v="127" actId="478"/>
-          <ac:spMkLst>
-            <pc:docMk/>
-            <pc:sldMk cId="0" sldId="263"/>
-            <ac:spMk id="12" creationId="{00000000-0000-0000-0000-000000000000}"/>
-          </ac:spMkLst>
-        </pc:spChg>
-        <pc:spChg chg="mod">
-          <ac:chgData name="윤서 김" userId="e850ce3416cb5bf2" providerId="LiveId" clId="{B3443B13-289E-406C-B0CA-A7E22F7EE38F}" dt="2026-08-03T12:41:32.429" v="366" actId="20577"/>
-          <ac:spMkLst>
-            <pc:docMk/>
-            <pc:sldMk cId="0" sldId="263"/>
-            <ac:spMk id="13" creationId="{00000000-0000-0000-0000-000000000000}"/>
-          </ac:spMkLst>
-        </pc:spChg>
-        <pc:spChg chg="del">
-          <ac:chgData name="윤서 김" userId="e850ce3416cb5bf2" providerId="LiveId" clId="{B3443B13-289E-406C-B0CA-A7E22F7EE38F}" dt="2026-08-03T12:33:46.990" v="161" actId="478"/>
-          <ac:spMkLst>
-            <pc:docMk/>
-            <pc:sldMk cId="0" sldId="263"/>
-            <ac:spMk id="17" creationId="{00000000-0000-0000-0000-000000000000}"/>
-          </ac:spMkLst>
-        </pc:spChg>
-        <pc:spChg chg="mod">
-          <ac:chgData name="윤서 김" userId="e850ce3416cb5bf2" providerId="LiveId" clId="{B3443B13-289E-406C-B0CA-A7E22F7EE38F}" dt="2026-08-03T12:37:17.106" v="296" actId="255"/>
-          <ac:spMkLst>
-            <pc:docMk/>
-            <pc:sldMk cId="0" sldId="263"/>
-            <ac:spMk id="18" creationId="{00000000-0000-0000-0000-000000000000}"/>
-          </ac:spMkLst>
-        </pc:spChg>
-        <pc:spChg chg="del">
-          <ac:chgData name="윤서 김" userId="e850ce3416cb5bf2" providerId="LiveId" clId="{B3443B13-289E-406C-B0CA-A7E22F7EE38F}" dt="2026-08-03T12:32:31.647" v="100" actId="478"/>
-          <ac:spMkLst>
-            <pc:docMk/>
-            <pc:sldMk cId="0" sldId="263"/>
-            <ac:spMk id="19" creationId="{00000000-0000-0000-0000-000000000000}"/>
-          </ac:spMkLst>
-        </pc:spChg>
-      </pc:sldChg>
-      <pc:sldChg chg="new del">
-        <pc:chgData name="윤서 김" userId="e850ce3416cb5bf2" providerId="LiveId" clId="{B3443B13-289E-406C-B0CA-A7E22F7EE38F}" dt="2026-08-03T12:32:53.105" v="103" actId="47"/>
-        <pc:sldMkLst>
-          <pc:docMk/>
-          <pc:sldMk cId="1175892365" sldId="264"/>
-        </pc:sldMkLst>
-      </pc:sldChg>
-      <pc:sldChg chg="add del setBg">
-        <pc:chgData name="윤서 김" userId="e850ce3416cb5bf2" providerId="LiveId" clId="{B3443B13-289E-406C-B0CA-A7E22F7EE38F}" dt="2026-08-03T12:32:55.632" v="104" actId="47"/>
-        <pc:sldMkLst>
-          <pc:docMk/>
-          <pc:sldMk cId="2245267323" sldId="265"/>
-        </pc:sldMkLst>
-      </pc:sldChg>
-    </pc:docChg>
-  </pc:docChgLst>
-</pc:chgInfo>
 </file>
 
 <file path=ppt/notesMasters/notesMaster1.xml><?xml version="1.0" encoding="utf-8"?>
@@ -465,16 +136,240 @@
           <a:chExt cx="0" cy="0"/>
         </a:xfrm>
       </p:grpSpPr>
+      <p:sp>
+        <p:nvSpPr>
+          <p:cNvPr id="2" name="Header Placeholder 1"/>
+          <p:cNvSpPr>
+            <a:spLocks noGrp="1"/>
+          </p:cNvSpPr>
+          <p:nvPr>
+            <p:ph type="hdr" sz="quarter"/>
+          </p:nvPr>
+        </p:nvSpPr>
+        <p:spPr>
+          <a:xfrm>
+            <a:off x="0" y="0"/>
+            <a:ext cx="2971800" cy="458788"/>
+          </a:xfrm>
+          <a:prstGeom prst="rect">
+            <a:avLst/>
+          </a:prstGeom>
+        </p:spPr>
+        <p:txBody>
+          <a:bodyPr vert="horz" lIns="91440" tIns="45720" rIns="91440" bIns="45720" rtlCol="0"/>
+          <a:lstStyle>
+            <a:lvl1pPr algn="l">
+              <a:defRPr sz="1200"/>
+            </a:lvl1pPr>
+          </a:lstStyle>
+          <a:p>
+            <a:endParaRPr lang="en-US"/>
+          </a:p>
+        </p:txBody>
+      </p:sp>
+      <p:sp>
+        <p:nvSpPr>
+          <p:cNvPr id="3" name="Date Placeholder 2"/>
+          <p:cNvSpPr>
+            <a:spLocks noGrp="1"/>
+          </p:cNvSpPr>
+          <p:nvPr>
+            <p:ph type="dt" idx="1"/>
+          </p:nvPr>
+        </p:nvSpPr>
+        <p:spPr>
+          <a:xfrm>
+            <a:off x="3884613" y="0"/>
+            <a:ext cx="2971800" cy="458788"/>
+          </a:xfrm>
+          <a:prstGeom prst="rect">
+            <a:avLst/>
+          </a:prstGeom>
+        </p:spPr>
+        <p:txBody>
+          <a:bodyPr vert="horz" lIns="91440" tIns="45720" rIns="91440" bIns="45720" rtlCol="0"/>
+          <a:lstStyle>
+            <a:lvl1pPr algn="r">
+              <a:defRPr sz="1200"/>
+            </a:lvl1pPr>
+          </a:lstStyle>
+          <a:p>
+            <a:fld id="{5282F153-3F37-0F45-9E97-73ACFA13230C}" type="datetimeFigureOut">
+              <a:rPr lang="en-US"/>
+              <a:t>7/23/19</a:t>
+            </a:fld>
+            <a:endParaRPr lang="en-US"/>
+          </a:p>
+        </p:txBody>
+      </p:sp>
+      <p:sp>
+        <p:nvSpPr>
+          <p:cNvPr id="4" name="Slide Image Placeholder 3"/>
+          <p:cNvSpPr>
+            <a:spLocks noGrp="1" noRot="1" noChangeAspect="1"/>
+          </p:cNvSpPr>
+          <p:nvPr>
+            <p:ph type="sldImg" idx="2"/>
+          </p:nvPr>
+        </p:nvSpPr>
+        <p:spPr>
+          <a:xfrm>
+            <a:off x="685800" y="1143000"/>
+            <a:ext cx="5486400" cy="3086100"/>
+          </a:xfrm>
+          <a:prstGeom prst="rect">
+            <a:avLst/>
+          </a:prstGeom>
+          <a:noFill/>
+          <a:ln w="12700">
+            <a:solidFill>
+              <a:prstClr val="black"/>
+            </a:solidFill>
+          </a:ln>
+        </p:spPr>
+        <p:txBody>
+          <a:bodyPr vert="horz" lIns="91440" tIns="45720" rIns="91440" bIns="45720" rtlCol="0" anchor="ctr"/>
+          <a:lstStyle/>
+          <a:p>
+            <a:endParaRPr lang="en-US"/>
+          </a:p>
+        </p:txBody>
+      </p:sp>
+      <p:sp>
+        <p:nvSpPr>
+          <p:cNvPr id="5" name="Notes Placeholder 4"/>
+          <p:cNvSpPr>
+            <a:spLocks noGrp="1"/>
+          </p:cNvSpPr>
+          <p:nvPr>
+            <p:ph type="body" sz="quarter" idx="3"/>
+          </p:nvPr>
+        </p:nvSpPr>
+        <p:spPr>
+          <a:xfrm>
+            <a:off x="685800" y="4400550"/>
+            <a:ext cx="5486400" cy="3600450"/>
+          </a:xfrm>
+          <a:prstGeom prst="rect">
+            <a:avLst/>
+          </a:prstGeom>
+        </p:spPr>
+        <p:txBody>
+          <a:bodyPr vert="horz" lIns="91440" tIns="45720" rIns="91440" bIns="45720" rtlCol="0"/>
+          <a:lstStyle/>
+          <a:p>
+            <a:pPr lvl="0"/>
+            <a:r>
+              <a:rPr lang="en-US"/>
+              <a:t>Click to edit Master text styles</a:t>
+            </a:r>
+          </a:p>
+          <a:p>
+            <a:pPr lvl="1"/>
+            <a:r>
+              <a:rPr lang="en-US"/>
+              <a:t>Second level</a:t>
+            </a:r>
+          </a:p>
+          <a:p>
+            <a:pPr lvl="2"/>
+            <a:r>
+              <a:rPr lang="en-US"/>
+              <a:t>Third level</a:t>
+            </a:r>
+          </a:p>
+          <a:p>
+            <a:pPr lvl="3"/>
+            <a:r>
+              <a:rPr lang="en-US"/>
+              <a:t>Fourth level</a:t>
+            </a:r>
+          </a:p>
+          <a:p>
+            <a:pPr lvl="4"/>
+            <a:r>
+              <a:rPr lang="en-US"/>
+              <a:t>Fifth level</a:t>
+            </a:r>
+          </a:p>
+        </p:txBody>
+      </p:sp>
+      <p:sp>
+        <p:nvSpPr>
+          <p:cNvPr id="6" name="Footer Placeholder 5"/>
+          <p:cNvSpPr>
+            <a:spLocks noGrp="1"/>
+          </p:cNvSpPr>
+          <p:nvPr>
+            <p:ph type="ftr" sz="quarter" idx="4"/>
+          </p:nvPr>
+        </p:nvSpPr>
+        <p:spPr>
+          <a:xfrm>
+            <a:off x="0" y="8685213"/>
+            <a:ext cx="2971800" cy="458787"/>
+          </a:xfrm>
+          <a:prstGeom prst="rect">
+            <a:avLst/>
+          </a:prstGeom>
+        </p:spPr>
+        <p:txBody>
+          <a:bodyPr vert="horz" lIns="91440" tIns="45720" rIns="91440" bIns="45720" rtlCol="0" anchor="b"/>
+          <a:lstStyle>
+            <a:lvl1pPr algn="l">
+              <a:defRPr sz="1200"/>
+            </a:lvl1pPr>
+          </a:lstStyle>
+          <a:p>
+            <a:endParaRPr lang="en-US"/>
+          </a:p>
+        </p:txBody>
+      </p:sp>
+      <p:sp>
+        <p:nvSpPr>
+          <p:cNvPr id="7" name="Slide Number Placeholder 6"/>
+          <p:cNvSpPr>
+            <a:spLocks noGrp="1"/>
+          </p:cNvSpPr>
+          <p:nvPr>
+            <p:ph type="sldNum" sz="quarter" idx="5"/>
+          </p:nvPr>
+        </p:nvSpPr>
+        <p:spPr>
+          <a:xfrm>
+            <a:off x="3884613" y="8685213"/>
+            <a:ext cx="2971800" cy="458787"/>
+          </a:xfrm>
+          <a:prstGeom prst="rect">
+            <a:avLst/>
+          </a:prstGeom>
+        </p:spPr>
+        <p:txBody>
+          <a:bodyPr vert="horz" lIns="91440" tIns="45720" rIns="91440" bIns="45720" rtlCol="0" anchor="b"/>
+          <a:lstStyle>
+            <a:lvl1pPr algn="r">
+              <a:defRPr sz="1200"/>
+            </a:lvl1pPr>
+          </a:lstStyle>
+          <a:p>
+            <a:fld id="{CE5E9CC1-C706-0F49-92D6-E571CC5EEA8F}" type="slidenum">
+              <a:rPr lang="en-US"/>
+              <a:t>‹#›</a:t>
+            </a:fld>
+            <a:endParaRPr lang="en-US"/>
+          </a:p>
+        </p:txBody>
+      </p:sp>
     </p:spTree>
     <p:extLst>
       <p:ext uri="{BB962C8B-B14F-4D97-AF65-F5344CB8AC3E}">
-        <p14:creationId xmlns:p14="http://schemas.microsoft.com/office/powerpoint/2010/main" val="620814230"/>
+        <p14:creationId xmlns:p14="http://schemas.microsoft.com/office/powerpoint/2010/main" val="1024086991"/>
       </p:ext>
     </p:extLst>
   </p:cSld>
   <p:clrMap bg1="lt1" tx1="dk1" bg2="lt2" tx2="dk2" accent1="accent1" accent2="accent2" accent3="accent3" accent4="accent4" accent5="accent5" accent6="accent6" hlink="hlink" folHlink="folHlink"/>
   <p:notesStyle>
-    <a:lvl1pPr marL="0" algn="l" defTabSz="914400" rtl="0" eaLnBrk="1" latinLnBrk="1" hangingPunct="1">
+    <a:lvl1pPr marL="0" algn="l" defTabSz="914400" rtl="0" eaLnBrk="1" latinLnBrk="0" hangingPunct="1">
       <a:defRPr sz="1200" kern="1200">
         <a:solidFill>
           <a:schemeClr val="tx1"/>
@@ -484,7 +379,7 @@
         <a:cs typeface="+mn-cs"/>
       </a:defRPr>
     </a:lvl1pPr>
-    <a:lvl2pPr marL="457200" algn="l" defTabSz="914400" rtl="0" eaLnBrk="1" latinLnBrk="1" hangingPunct="1">
+    <a:lvl2pPr marL="457200" algn="l" defTabSz="914400" rtl="0" eaLnBrk="1" latinLnBrk="0" hangingPunct="1">
       <a:defRPr sz="1200" kern="1200">
         <a:solidFill>
           <a:schemeClr val="tx1"/>
@@ -494,7 +389,7 @@
         <a:cs typeface="+mn-cs"/>
       </a:defRPr>
     </a:lvl2pPr>
-    <a:lvl3pPr marL="914400" algn="l" defTabSz="914400" rtl="0" eaLnBrk="1" latinLnBrk="1" hangingPunct="1">
+    <a:lvl3pPr marL="914400" algn="l" defTabSz="914400" rtl="0" eaLnBrk="1" latinLnBrk="0" hangingPunct="1">
       <a:defRPr sz="1200" kern="1200">
         <a:solidFill>
           <a:schemeClr val="tx1"/>
@@ -504,7 +399,7 @@
         <a:cs typeface="+mn-cs"/>
       </a:defRPr>
     </a:lvl3pPr>
-    <a:lvl4pPr marL="1371600" algn="l" defTabSz="914400" rtl="0" eaLnBrk="1" latinLnBrk="1" hangingPunct="1">
+    <a:lvl4pPr marL="1371600" algn="l" defTabSz="914400" rtl="0" eaLnBrk="1" latinLnBrk="0" hangingPunct="1">
       <a:defRPr sz="1200" kern="1200">
         <a:solidFill>
           <a:schemeClr val="tx1"/>
@@ -514,7 +409,7 @@
         <a:cs typeface="+mn-cs"/>
       </a:defRPr>
     </a:lvl4pPr>
-    <a:lvl5pPr marL="1828800" algn="l" defTabSz="914400" rtl="0" eaLnBrk="1" latinLnBrk="1" hangingPunct="1">
+    <a:lvl5pPr marL="1828800" algn="l" defTabSz="914400" rtl="0" eaLnBrk="1" latinLnBrk="0" hangingPunct="1">
       <a:defRPr sz="1200" kern="1200">
         <a:solidFill>
           <a:schemeClr val="tx1"/>
@@ -524,7 +419,7 @@
         <a:cs typeface="+mn-cs"/>
       </a:defRPr>
     </a:lvl5pPr>
-    <a:lvl6pPr marL="2286000" algn="l" defTabSz="914400" rtl="0" eaLnBrk="1" latinLnBrk="1" hangingPunct="1">
+    <a:lvl6pPr marL="2286000" algn="l" defTabSz="914400" rtl="0" eaLnBrk="1" latinLnBrk="0" hangingPunct="1">
       <a:defRPr sz="1200" kern="1200">
         <a:solidFill>
           <a:schemeClr val="tx1"/>
@@ -534,7 +429,7 @@
         <a:cs typeface="+mn-cs"/>
       </a:defRPr>
     </a:lvl6pPr>
-    <a:lvl7pPr marL="2743200" algn="l" defTabSz="914400" rtl="0" eaLnBrk="1" latinLnBrk="1" hangingPunct="1">
+    <a:lvl7pPr marL="2743200" algn="l" defTabSz="914400" rtl="0" eaLnBrk="1" latinLnBrk="0" hangingPunct="1">
       <a:defRPr sz="1200" kern="1200">
         <a:solidFill>
           <a:schemeClr val="tx1"/>
@@ -544,7 +439,7 @@
         <a:cs typeface="+mn-cs"/>
       </a:defRPr>
     </a:lvl7pPr>
-    <a:lvl8pPr marL="3200400" algn="l" defTabSz="914400" rtl="0" eaLnBrk="1" latinLnBrk="1" hangingPunct="1">
+    <a:lvl8pPr marL="3200400" algn="l" defTabSz="914400" rtl="0" eaLnBrk="1" latinLnBrk="0" hangingPunct="1">
       <a:defRPr sz="1200" kern="1200">
         <a:solidFill>
           <a:schemeClr val="tx1"/>
@@ -554,7 +449,7 @@
         <a:cs typeface="+mn-cs"/>
       </a:defRPr>
     </a:lvl8pPr>
-    <a:lvl9pPr marL="3657600" algn="l" defTabSz="914400" rtl="0" eaLnBrk="1" latinLnBrk="1" hangingPunct="1">
+    <a:lvl9pPr marL="3657600" algn="l" defTabSz="914400" rtl="0" eaLnBrk="1" latinLnBrk="0" hangingPunct="1">
       <a:defRPr sz="1200" kern="1200">
         <a:solidFill>
           <a:schemeClr val="tx1"/>
@@ -614,8 +509,9 @@
           <a:p>
             <a:r>
               <a:rPr lang="en-US" dirty="0"/>
-              <a:t>안녕하세요. 기획재정담당관실 김윤서입니다. 국정감사 질의서를 AI가 담당 부서로 분류하고 답변 초안까지 만들어주는 서비스를 만들어봤고, 그 과정을 공유드리겠습니다.</a:t>
-            </a:r>
+              <a:t>안녕하세요. 기획재정담당관실 김윤서입니다. 국회에서 내려온 질의서를 AI가 담당 부서로 분류하고 답변 초안까지 만들어주는 서비스를 만들어봤고, 그 과정을 공유드리겠습니다.</a:t>
+            </a:r>
+            <a:endParaRPr lang="en-US" dirty="0"/>
           </a:p>
         </p:txBody>
       </p:sp>
@@ -703,6 +599,7 @@
               <a:rPr lang="en-US" dirty="0"/>
               <a:t>국정감사 시즌이면 질의서가 한꺼번에 내려옵니다. 그때마다 어느 과 소관인지 판단하고, 답변 초안도 매번 처음부터 씁니다. 마침 전공이 소프트웨어라서, 업무에서 느낀 불편을 직접 만들어 풀어보자고 생각했습니다.</a:t>
             </a:r>
+            <a:endParaRPr lang="en-US" dirty="0"/>
           </a:p>
         </p:txBody>
       </p:sp>
@@ -790,6 +687,7 @@
               <a:rPr lang="en-US" dirty="0"/>
               <a:t>질의서를 붙여넣으면 AI가 부서 후보 3개를 신뢰도와 함께 제시합니다. 담당자가 그중 하나를 확정하면 답변 초안이 생성되고, 검토·수정 후 저장됩니다. 중요한 건 가운데 단계입니다. AI가 스스로 배정하지 않고 최종 판단은 반드시 사람이 합니다.</a:t>
             </a:r>
+            <a:endParaRPr lang="en-US" dirty="0"/>
           </a:p>
         </p:txBody>
       </p:sp>
@@ -877,6 +775,7 @@
               <a:rPr lang="en-US" dirty="0"/>
               <a:t>기능은 딱 두 가지입니다. 분류와 초안 생성. 대신 AI가 지켜야 할 규칙을 숫자로 못 박았습니다. 후보는 3개, 초안은 500자 이내, 확인이 필요한 수치에는 표시를 붙이고, 검토 안내 문구는 코드에서 강제로 넣습니다. 검토 없이 그대로 나가지 않도록 한 겁니다.</a:t>
             </a:r>
+            <a:endParaRPr lang="en-US" dirty="0"/>
           </a:p>
         </p:txBody>
       </p:sp>
@@ -964,6 +863,7 @@
               <a:rPr lang="en-US" dirty="0"/>
               <a:t>기술 구성입니다. Next.js 하나로 화면과 서버를 만들고 Vercel로 배포했습니다. 이력은 Supabase에 저장하고, 분류와 초안은 OpenAI를 씁니다. 과거 사례는 열린국회정보 API에서 가져와 PDF 본문까지 실제로 뽑아냅니다.</a:t>
             </a:r>
+            <a:endParaRPr lang="en-US" dirty="0"/>
           </a:p>
         </p:txBody>
       </p:sp>
@@ -1051,6 +951,7 @@
               <a:rPr lang="en-US" dirty="0"/>
               <a:t>현재 상태입니다. 기획 문서를 먼저 쓰고, 두 기능을 구현해서 실제 배포까지 마쳤습니다. 지금 이 주소로 들어가면 바로 쓸 수 있고, 실제로 질의서를 넣어 분류부터 저장까지 되는 것을 확인했습니다.</a:t>
             </a:r>
+            <a:endParaRPr lang="en-US" dirty="0"/>
           </a:p>
         </p:txBody>
       </p:sp>
@@ -1136,8 +1037,9 @@
           <a:p>
             <a:r>
               <a:rPr lang="en-US" dirty="0"/>
-              <a:t>앞으로는 세 단계로 보고 있습니다. 먼저 AI가 틀린 경우를 기록으로 남겨 정답 데이터를 쌓고, 그 다음 검색을 의미 기반으로 바꾸고, 마지막으로 속도와 로그인 같은 운영 부분을 다듬으려 합니다. 감사합니다.</a:t>
-            </a:r>
+              <a:t>솔직하게 한계도 말씀드리겠습니다. 가장 큰 건 실·국·과 단위 정답 데이터가 공개 데이터에 없다는 점입니다. 그리고 유사 사례를 글자 겹침으로만 찾고 있고, 매번 외부 자료를 새로 가져와서 6에서 10초 정도 걸립니다.</a:t>
+            </a:r>
+            <a:endParaRPr lang="en-US" dirty="0"/>
           </a:p>
         </p:txBody>
       </p:sp>
@@ -1159,6 +1061,94 @@
             <a:fld id="{F7021451-1387-4CA6-816F-3879F97B5CBC}" type="slidenum">
               <a:rPr lang="en-US"/>
               <a:t>7</a:t>
+            </a:fld>
+            <a:endParaRPr lang="en-US"/>
+          </a:p>
+        </p:txBody>
+      </p:sp>
+    </p:spTree>
+    <p:extLst>
+      <p:ext uri="{BB962C8B-B14F-4D97-AF65-F5344CB8AC3E}">
+        <p14:creationId xmlns:p14="http://schemas.microsoft.com/office/powerpoint/2010/main" val="1024086991"/>
+      </p:ext>
+    </p:extLst>
+  </p:cSld>
+  <p:clrMapOvr>
+    <a:masterClrMapping/>
+  </p:clrMapOvr>
+</p:notes>
+</file>
+
+<file path=ppt/notesSlides/notesSlide8.xml><?xml version="1.0" encoding="utf-8"?>
+<p:notes xmlns:a="http://schemas.openxmlformats.org/drawingml/2006/main" xmlns:r="http://schemas.openxmlformats.org/officeDocument/2006/relationships" xmlns:p="http://schemas.openxmlformats.org/presentationml/2006/main">
+  <p:cSld>
+    <p:spTree>
+      <p:nvGrpSpPr>
+        <p:cNvPr id="1" name=""/>
+        <p:cNvGrpSpPr/>
+        <p:nvPr/>
+      </p:nvGrpSpPr>
+      <p:grpSpPr>
+        <a:xfrm>
+          <a:off x="0" y="0"/>
+          <a:ext cx="0" cy="0"/>
+          <a:chOff x="0" y="0"/>
+          <a:chExt cx="0" cy="0"/>
+        </a:xfrm>
+      </p:grpSpPr>
+      <p:sp>
+        <p:nvSpPr>
+          <p:cNvPr id="2" name="Slide Image Placeholder 1"/>
+          <p:cNvSpPr>
+            <a:spLocks noGrp="1" noRot="1" noChangeAspect="1"/>
+          </p:cNvSpPr>
+          <p:nvPr>
+            <p:ph type="sldImg"/>
+          </p:nvPr>
+        </p:nvSpPr>
+        <p:spPr/>
+      </p:sp>
+      <p:sp>
+        <p:nvSpPr>
+          <p:cNvPr id="3" name="Notes Placeholder 2"/>
+          <p:cNvSpPr>
+            <a:spLocks noGrp="1"/>
+          </p:cNvSpPr>
+          <p:nvPr>
+            <p:ph type="body" idx="1"/>
+          </p:nvPr>
+        </p:nvSpPr>
+        <p:spPr/>
+        <p:txBody>
+          <a:bodyPr/>
+          <a:lstStyle/>
+          <a:p>
+            <a:r>
+              <a:rPr lang="en-US" dirty="0"/>
+              <a:t>앞으로는 세 단계로 보고 있습니다. 먼저 AI가 틀린 경우를 기록으로 남겨 정답 데이터를 쌓고, 그 다음 검색을 의미 기반으로 바꾸고, 마지막으로 속도와 로그인 같은 운영 부분을 다듬으려 합니다. 감사합니다.</a:t>
+            </a:r>
+            <a:endParaRPr lang="en-US" dirty="0"/>
+          </a:p>
+        </p:txBody>
+      </p:sp>
+      <p:sp>
+        <p:nvSpPr>
+          <p:cNvPr id="4" name="Slide Number Placeholder 3"/>
+          <p:cNvSpPr>
+            <a:spLocks noGrp="1"/>
+          </p:cNvSpPr>
+          <p:nvPr>
+            <p:ph type="sldNum" sz="quarter" idx="10"/>
+          </p:nvPr>
+        </p:nvSpPr>
+        <p:spPr/>
+        <p:txBody>
+          <a:bodyPr/>
+          <a:lstStyle/>
+          <a:p>
+            <a:fld id="{F7021451-1387-4CA6-816F-3879F97B5CBC}" type="slidenum">
+              <a:rPr lang="en-US"/>
+              <a:t>8</a:t>
             </a:fld>
             <a:endParaRPr lang="en-US"/>
           </a:p>
@@ -1210,11 +1200,6 @@
 <file path=ppt/slideMasters/slideMaster1.xml><?xml version="1.0" encoding="utf-8"?>
 <p:sldMaster xmlns:a="http://schemas.openxmlformats.org/drawingml/2006/main" xmlns:r="http://schemas.openxmlformats.org/officeDocument/2006/relationships" xmlns:p="http://schemas.openxmlformats.org/presentationml/2006/main">
   <p:cSld>
-    <p:bg>
-      <p:bgRef idx="1001">
-        <a:schemeClr val="bg1"/>
-      </p:bgRef>
-    </p:bg>
     <p:spTree>
       <p:nvGrpSpPr>
         <p:cNvPr id="1" name=""/>
@@ -1497,7 +1482,6 @@
         <a:solidFill>
           <a:srgbClr val="1E2761"/>
         </a:solidFill>
-        <a:effectLst/>
       </p:bgPr>
     </p:bg>
     <p:spTree>
@@ -1542,13 +1526,6 @@
             <a:prstDash val="solid"/>
           </a:ln>
         </p:spPr>
-        <p:txBody>
-          <a:bodyPr/>
-          <a:lstStyle/>
-          <a:p>
-            <a:endParaRPr lang="ko-KR" altLang="en-US"/>
-          </a:p>
-        </p:txBody>
       </p:sp>
       <p:sp>
         <p:nvSpPr>
@@ -1578,13 +1555,6 @@
             <a:prstDash val="solid"/>
           </a:ln>
         </p:spPr>
-        <p:txBody>
-          <a:bodyPr/>
-          <a:lstStyle/>
-          <a:p>
-            <a:endParaRPr lang="ko-KR" altLang="en-US"/>
-          </a:p>
-        </p:txBody>
       </p:sp>
       <p:sp>
         <p:nvSpPr>
@@ -1607,11 +1577,11 @@
           <a:bodyPr wrap="square" lIns="0" tIns="0" rIns="0" bIns="0" rtlCol="0" anchor="ctr"/>
           <a:lstStyle/>
           <a:p>
-            <a:pPr marL="0" indent="0">
-              <a:buNone/>
-            </a:pPr>
-            <a:r>
-              <a:rPr lang="en-US" sz="1500" b="1" kern="0" spc="200" dirty="0">
+            <a:pPr indent="0" marL="0">
+              <a:buNone/>
+            </a:pPr>
+            <a:r>
+              <a:rPr lang="en-US" sz="1500" b="1" spc="200" kern="0" dirty="0">
                 <a:solidFill>
                   <a:srgbClr val="CADCFC"/>
                 </a:solidFill>
@@ -1619,7 +1589,7 @@
                 <a:ea typeface="Malgun Gothic" pitchFamily="34" charset="-122"/>
                 <a:cs typeface="Malgun Gothic" pitchFamily="34" charset="-120"/>
               </a:rPr>
-              <a:t>국정감사 업무 자동화</a:t>
+              <a:t>국회 질의서 업무 자동화</a:t>
             </a:r>
             <a:endParaRPr lang="en-US" sz="1500" dirty="0"/>
           </a:p>
@@ -1646,7 +1616,7 @@
           <a:bodyPr wrap="square" lIns="0" tIns="0" rIns="0" bIns="0" rtlCol="0" anchor="ctr"/>
           <a:lstStyle/>
           <a:p>
-            <a:pPr marL="0" indent="0">
+            <a:pPr indent="0" marL="0">
               <a:lnSpc>
                 <a:spcPts val="5000"/>
               </a:lnSpc>
@@ -1666,7 +1636,7 @@
             <a:endParaRPr lang="en-US" sz="4000" dirty="0"/>
           </a:p>
           <a:p>
-            <a:pPr marL="0" indent="0">
+            <a:pPr indent="0" marL="0">
               <a:lnSpc>
                 <a:spcPts val="5000"/>
               </a:lnSpc>
@@ -1708,7 +1678,7 @@
           <a:bodyPr wrap="square" lIns="0" tIns="0" rIns="0" bIns="0" rtlCol="0" anchor="ctr"/>
           <a:lstStyle/>
           <a:p>
-            <a:pPr marL="0" indent="0">
+            <a:pPr indent="0" marL="0">
               <a:buNone/>
             </a:pPr>
             <a:r>
@@ -1747,7 +1717,7 @@
           <a:bodyPr wrap="square" lIns="0" tIns="0" rIns="0" bIns="0" rtlCol="0" anchor="ctr"/>
           <a:lstStyle/>
           <a:p>
-            <a:pPr marL="0" indent="0">
+            <a:pPr indent="0" marL="0">
               <a:buNone/>
             </a:pPr>
             <a:r>
@@ -1781,7 +1751,6 @@
         <a:solidFill>
           <a:srgbClr val="F4F6FB"/>
         </a:solidFill>
-        <a:effectLst/>
       </p:bgPr>
     </p:bg>
     <p:spTree>
@@ -1819,7 +1788,7 @@
           <a:bodyPr wrap="square" lIns="0" tIns="0" rIns="0" bIns="0" rtlCol="0" anchor="ctr"/>
           <a:lstStyle/>
           <a:p>
-            <a:pPr marL="0" indent="0">
+            <a:pPr indent="0" marL="0">
               <a:buNone/>
             </a:pPr>
             <a:r>
@@ -1858,7 +1827,7 @@
           <a:bodyPr wrap="square" lIns="0" tIns="0" rIns="0" bIns="0" rtlCol="0" anchor="ctr"/>
           <a:lstStyle/>
           <a:p>
-            <a:pPr marL="0" indent="0">
+            <a:pPr indent="0" marL="0">
               <a:buNone/>
             </a:pPr>
             <a:r>
@@ -1900,13 +1869,6 @@
             <a:prstDash val="solid"/>
           </a:ln>
         </p:spPr>
-        <p:txBody>
-          <a:bodyPr/>
-          <a:lstStyle/>
-          <a:p>
-            <a:endParaRPr lang="ko-KR" altLang="en-US"/>
-          </a:p>
-        </p:txBody>
       </p:sp>
       <p:sp>
         <p:nvSpPr>
@@ -1929,7 +1891,7 @@
           <a:bodyPr wrap="square" lIns="0" tIns="0" rIns="0" bIns="0" rtlCol="0" anchor="ctr"/>
           <a:lstStyle/>
           <a:p>
-            <a:pPr marL="0" indent="0" algn="ctr">
+            <a:pPr algn="ctr" indent="0" marL="0">
               <a:buNone/>
             </a:pPr>
             <a:r>
@@ -1968,7 +1930,7 @@
           <a:bodyPr wrap="square" lIns="0" tIns="0" rIns="0" bIns="0" rtlCol="0" anchor="ctr"/>
           <a:lstStyle/>
           <a:p>
-            <a:pPr marL="0" indent="0">
+            <a:pPr indent="0" marL="0">
               <a:buNone/>
             </a:pPr>
             <a:r>
@@ -2007,7 +1969,7 @@
           <a:bodyPr wrap="square" lIns="0" tIns="0" rIns="0" bIns="0" rtlCol="0" anchor="ctr"/>
           <a:lstStyle/>
           <a:p>
-            <a:pPr marL="0" indent="0">
+            <a:pPr indent="0" marL="0">
               <a:buNone/>
             </a:pPr>
             <a:r>
@@ -2049,13 +2011,6 @@
             <a:prstDash val="solid"/>
           </a:ln>
         </p:spPr>
-        <p:txBody>
-          <a:bodyPr/>
-          <a:lstStyle/>
-          <a:p>
-            <a:endParaRPr lang="ko-KR" altLang="en-US"/>
-          </a:p>
-        </p:txBody>
       </p:sp>
       <p:sp>
         <p:nvSpPr>
@@ -2078,7 +2033,7 @@
           <a:bodyPr wrap="square" lIns="0" tIns="0" rIns="0" bIns="0" rtlCol="0" anchor="ctr"/>
           <a:lstStyle/>
           <a:p>
-            <a:pPr marL="0" indent="0" algn="ctr">
+            <a:pPr algn="ctr" indent="0" marL="0">
               <a:buNone/>
             </a:pPr>
             <a:r>
@@ -2117,7 +2072,7 @@
           <a:bodyPr wrap="square" lIns="0" tIns="0" rIns="0" bIns="0" rtlCol="0" anchor="ctr"/>
           <a:lstStyle/>
           <a:p>
-            <a:pPr marL="0" indent="0">
+            <a:pPr indent="0" marL="0">
               <a:buNone/>
             </a:pPr>
             <a:r>
@@ -2156,7 +2111,7 @@
           <a:bodyPr wrap="square" lIns="0" tIns="0" rIns="0" bIns="0" rtlCol="0" anchor="ctr"/>
           <a:lstStyle/>
           <a:p>
-            <a:pPr marL="0" indent="0">
+            <a:pPr indent="0" marL="0">
               <a:buNone/>
             </a:pPr>
             <a:r>
@@ -2198,13 +2153,6 @@
             <a:prstDash val="solid"/>
           </a:ln>
         </p:spPr>
-        <p:txBody>
-          <a:bodyPr/>
-          <a:lstStyle/>
-          <a:p>
-            <a:endParaRPr lang="ko-KR" altLang="en-US"/>
-          </a:p>
-        </p:txBody>
       </p:sp>
       <p:sp>
         <p:nvSpPr>
@@ -2227,7 +2175,7 @@
           <a:bodyPr wrap="square" lIns="0" tIns="0" rIns="0" bIns="0" rtlCol="0" anchor="ctr"/>
           <a:lstStyle/>
           <a:p>
-            <a:pPr marL="0" indent="0" algn="ctr">
+            <a:pPr algn="ctr" indent="0" marL="0">
               <a:buNone/>
             </a:pPr>
             <a:r>
@@ -2266,7 +2214,7 @@
           <a:bodyPr wrap="square" lIns="0" tIns="0" rIns="0" bIns="0" rtlCol="0" anchor="ctr"/>
           <a:lstStyle/>
           <a:p>
-            <a:pPr marL="0" indent="0">
+            <a:pPr indent="0" marL="0">
               <a:buNone/>
             </a:pPr>
             <a:r>
@@ -2305,7 +2253,7 @@
           <a:bodyPr wrap="square" lIns="0" tIns="0" rIns="0" bIns="0" rtlCol="0" anchor="ctr"/>
           <a:lstStyle/>
           <a:p>
-            <a:pPr marL="0" indent="0">
+            <a:pPr indent="0" marL="0">
               <a:buNone/>
             </a:pPr>
             <a:r>
@@ -2331,8 +2279,8 @@
         </p:nvSpPr>
         <p:spPr>
           <a:xfrm>
-            <a:off x="7895762" y="2025483"/>
-            <a:ext cx="3947448" cy="3733512"/>
+            <a:off x="7818120" y="2011680"/>
+            <a:ext cx="3657600" cy="3749040"/>
           </a:xfrm>
           <a:prstGeom prst="roundRect">
             <a:avLst>
@@ -2349,18 +2297,50 @@
             <a:prstDash val="solid"/>
           </a:ln>
           <a:effectLst>
-            <a:outerShdw blurRad="127000" dist="25400" dir="5400000" algn="bl" rotWithShape="0">
+            <a:outerShdw sx="100000" sy="100000" kx="0" ky="0" algn="bl" rotWithShape="0" blurRad="127000" dist="25400" dir="5400000">
               <a:srgbClr val="1E2761">
                 <a:alpha val="10000"/>
               </a:srgbClr>
             </a:outerShdw>
           </a:effectLst>
         </p:spPr>
-        <p:txBody>
-          <a:bodyPr/>
-          <a:lstStyle/>
-          <a:p>
-            <a:endParaRPr lang="ko-KR" altLang="en-US"/>
+      </p:sp>
+      <p:sp>
+        <p:nvSpPr>
+          <p:cNvPr id="17" name="Text 15"/>
+          <p:cNvSpPr/>
+          <p:nvPr/>
+        </p:nvSpPr>
+        <p:spPr>
+          <a:xfrm>
+            <a:off x="8183880" y="2468880"/>
+            <a:ext cx="2926080" cy="320040"/>
+          </a:xfrm>
+          <a:prstGeom prst="rect">
+            <a:avLst/>
+          </a:prstGeom>
+          <a:noFill/>
+          <a:ln/>
+        </p:spPr>
+        <p:txBody>
+          <a:bodyPr wrap="square" lIns="0" tIns="0" rIns="0" bIns="0" rtlCol="0" anchor="ctr"/>
+          <a:lstStyle/>
+          <a:p>
+            <a:pPr indent="0" marL="0">
+              <a:buNone/>
+            </a:pPr>
+            <a:r>
+              <a:rPr lang="en-US" sz="1400" b="1" spc="200" kern="0" dirty="0">
+                <a:solidFill>
+                  <a:srgbClr val="CADCFC"/>
+                </a:solidFill>
+                <a:latin typeface="Malgun Gothic" pitchFamily="34" charset="0"/>
+                <a:ea typeface="Malgun Gothic" pitchFamily="34" charset="-122"/>
+                <a:cs typeface="Malgun Gothic" pitchFamily="34" charset="-120"/>
+              </a:rPr>
+              <a:t>그래서</a:t>
+            </a:r>
+            <a:endParaRPr lang="en-US" sz="1400" dirty="0"/>
           </a:p>
         </p:txBody>
       </p:sp>
@@ -2372,26 +2352,27 @@
         </p:nvSpPr>
         <p:spPr>
           <a:xfrm>
-            <a:off x="8138160" y="2602763"/>
-            <a:ext cx="3947448" cy="2578953"/>
-          </a:xfrm>
-          <a:prstGeom prst="rect">
-            <a:avLst/>
-          </a:prstGeom>
-          <a:noFill/>
-          <a:ln/>
-        </p:spPr>
-        <p:txBody>
-          <a:bodyPr wrap="square" lIns="0" tIns="0" rIns="0" bIns="0" rtlCol="0" anchor="ctr"/>
-          <a:lstStyle/>
-          <a:p>
-            <a:pPr>
+            <a:off x="8183880" y="2926080"/>
+            <a:ext cx="3017520" cy="1097280"/>
+          </a:xfrm>
+          <a:prstGeom prst="rect">
+            <a:avLst/>
+          </a:prstGeom>
+          <a:noFill/>
+          <a:ln/>
+        </p:spPr>
+        <p:txBody>
+          <a:bodyPr wrap="square" lIns="0" tIns="0" rIns="0" bIns="0" rtlCol="0" anchor="ctr"/>
+          <a:lstStyle/>
+          <a:p>
+            <a:pPr indent="0" marL="0">
               <a:lnSpc>
                 <a:spcPts val="3000"/>
               </a:lnSpc>
-            </a:pPr>
-            <a:r>
-              <a:rPr lang="ko-KR" altLang="en-US" sz="2000" dirty="0">
+              <a:buNone/>
+            </a:pPr>
+            <a:r>
+              <a:rPr lang="en-US" sz="2000" b="1" dirty="0">
                 <a:solidFill>
                   <a:srgbClr val="FFFFFF"/>
                 </a:solidFill>
@@ -2399,25 +2380,19 @@
                 <a:ea typeface="Malgun Gothic" pitchFamily="34" charset="-122"/>
                 <a:cs typeface="Malgun Gothic" pitchFamily="34" charset="-120"/>
               </a:rPr>
-              <a:t>기획재정담당관에서 근무하며</a:t>
-            </a:r>
-            <a:endParaRPr lang="en-US" altLang="ko-KR" sz="2000" dirty="0">
-              <a:solidFill>
-                <a:srgbClr val="FFFFFF"/>
-              </a:solidFill>
-              <a:latin typeface="Malgun Gothic" pitchFamily="34" charset="0"/>
-              <a:ea typeface="Malgun Gothic" pitchFamily="34" charset="-122"/>
-              <a:cs typeface="Malgun Gothic" pitchFamily="34" charset="-120"/>
-            </a:endParaRPr>
-          </a:p>
-          <a:p>
-            <a:pPr>
+              <a:t>전공이 소프트웨어니까,</a:t>
+            </a:r>
+            <a:endParaRPr lang="en-US" sz="2000" dirty="0"/>
+          </a:p>
+          <a:p>
+            <a:pPr indent="0" marL="0">
               <a:lnSpc>
                 <a:spcPts val="3000"/>
               </a:lnSpc>
-            </a:pPr>
-            <a:r>
-              <a:rPr lang="ko-KR" altLang="en-US" sz="2000" dirty="0">
+              <a:buNone/>
+            </a:pPr>
+            <a:r>
+              <a:rPr lang="en-US" sz="2000" b="1" dirty="0">
                 <a:solidFill>
                   <a:srgbClr val="FFFFFF"/>
                 </a:solidFill>
@@ -2425,123 +2400,91 @@
                 <a:ea typeface="Malgun Gothic" pitchFamily="34" charset="-122"/>
                 <a:cs typeface="Malgun Gothic" pitchFamily="34" charset="-120"/>
               </a:rPr>
-              <a:t>반복적인 국회 질의 대응과 </a:t>
-            </a:r>
-            <a:endParaRPr lang="en-US" altLang="ko-KR" sz="2000" dirty="0">
-              <a:solidFill>
-                <a:srgbClr val="FFFFFF"/>
-              </a:solidFill>
-              <a:latin typeface="Malgun Gothic" pitchFamily="34" charset="0"/>
-              <a:ea typeface="Malgun Gothic" pitchFamily="34" charset="-122"/>
-              <a:cs typeface="Malgun Gothic" pitchFamily="34" charset="-120"/>
-            </a:endParaRPr>
-          </a:p>
-          <a:p>
-            <a:pPr>
+              <a:t>직접 만들어 보자</a:t>
+            </a:r>
+            <a:endParaRPr lang="en-US" sz="2000" dirty="0"/>
+          </a:p>
+        </p:txBody>
+      </p:sp>
+      <p:sp>
+        <p:nvSpPr>
+          <p:cNvPr id="19" name="Text 17"/>
+          <p:cNvSpPr/>
+          <p:nvPr/>
+        </p:nvSpPr>
+        <p:spPr>
+          <a:xfrm>
+            <a:off x="8183880" y="4297680"/>
+            <a:ext cx="3017520" cy="1097280"/>
+          </a:xfrm>
+          <a:prstGeom prst="rect">
+            <a:avLst/>
+          </a:prstGeom>
+          <a:noFill/>
+          <a:ln/>
+        </p:spPr>
+        <p:txBody>
+          <a:bodyPr wrap="square" lIns="0" tIns="0" rIns="0" bIns="0" rtlCol="0" anchor="ctr"/>
+          <a:lstStyle/>
+          <a:p>
+            <a:pPr indent="0" marL="0">
               <a:lnSpc>
-                <a:spcPts val="3000"/>
+                <a:spcPts val="2000"/>
               </a:lnSpc>
-            </a:pPr>
-            <a:r>
-              <a:rPr lang="ko-KR" altLang="en-US" sz="2000" dirty="0">
-                <a:solidFill>
-                  <a:srgbClr val="FFFFFF"/>
-                </a:solidFill>
-                <a:latin typeface="Malgun Gothic" pitchFamily="34" charset="0"/>
-                <a:ea typeface="Malgun Gothic" pitchFamily="34" charset="-122"/>
-                <a:cs typeface="Malgun Gothic" pitchFamily="34" charset="-120"/>
-              </a:rPr>
-              <a:t>담당 부서 분류 과정의 불편을 발견했고</a:t>
-            </a:r>
-            <a:r>
-              <a:rPr lang="en-US" altLang="ko-KR" sz="2000" dirty="0">
-                <a:solidFill>
-                  <a:srgbClr val="FFFFFF"/>
-                </a:solidFill>
-                <a:latin typeface="Malgun Gothic" pitchFamily="34" charset="0"/>
-                <a:ea typeface="Malgun Gothic" pitchFamily="34" charset="-122"/>
-                <a:cs typeface="Malgun Gothic" pitchFamily="34" charset="-120"/>
-              </a:rPr>
-              <a:t>, </a:t>
-            </a:r>
-          </a:p>
-          <a:p>
-            <a:pPr>
+              <a:buNone/>
+            </a:pPr>
+            <a:r>
+              <a:rPr lang="en-US" sz="1250" dirty="0">
+                <a:solidFill>
+                  <a:srgbClr val="CADCFC"/>
+                </a:solidFill>
+                <a:latin typeface="Malgun Gothic" pitchFamily="34" charset="0"/>
+                <a:ea typeface="Malgun Gothic" pitchFamily="34" charset="-122"/>
+                <a:cs typeface="Malgun Gothic" pitchFamily="34" charset="-120"/>
+              </a:rPr>
+              <a:t>업무에서 직접 느낀 불편이라</a:t>
+            </a:r>
+            <a:endParaRPr lang="en-US" sz="1250" dirty="0"/>
+          </a:p>
+          <a:p>
+            <a:pPr indent="0" marL="0">
               <a:lnSpc>
-                <a:spcPts val="3000"/>
+                <a:spcPts val="2000"/>
               </a:lnSpc>
-            </a:pPr>
-            <a:r>
-              <a:rPr lang="ko-KR" altLang="en-US" sz="2000" dirty="0">
-                <a:solidFill>
-                  <a:srgbClr val="FFFFFF"/>
-                </a:solidFill>
-                <a:latin typeface="Malgun Gothic" pitchFamily="34" charset="0"/>
-                <a:ea typeface="Malgun Gothic" pitchFamily="34" charset="-122"/>
-                <a:cs typeface="Malgun Gothic" pitchFamily="34" charset="-120"/>
-              </a:rPr>
-              <a:t>이를 </a:t>
-            </a:r>
-            <a:r>
-              <a:rPr lang="en-US" altLang="ko-KR" sz="2000" dirty="0">
-                <a:solidFill>
-                  <a:srgbClr val="FFFFFF"/>
-                </a:solidFill>
-                <a:latin typeface="Malgun Gothic" pitchFamily="34" charset="0"/>
-                <a:ea typeface="Malgun Gothic" pitchFamily="34" charset="-122"/>
-                <a:cs typeface="Malgun Gothic" pitchFamily="34" charset="-120"/>
-              </a:rPr>
-              <a:t>AI </a:t>
-            </a:r>
-            <a:r>
-              <a:rPr lang="ko-KR" altLang="en-US" sz="2000" dirty="0">
-                <a:solidFill>
-                  <a:srgbClr val="FFFFFF"/>
-                </a:solidFill>
-                <a:latin typeface="Malgun Gothic" pitchFamily="34" charset="0"/>
-                <a:ea typeface="Malgun Gothic" pitchFamily="34" charset="-122"/>
-                <a:cs typeface="Malgun Gothic" pitchFamily="34" charset="-120"/>
-              </a:rPr>
-              <a:t>기반 자동화 서비스로</a:t>
-            </a:r>
-            <a:endParaRPr lang="en-US" altLang="ko-KR" sz="2000" dirty="0">
-              <a:solidFill>
-                <a:srgbClr val="FFFFFF"/>
-              </a:solidFill>
-              <a:latin typeface="Malgun Gothic" pitchFamily="34" charset="0"/>
-              <a:ea typeface="Malgun Gothic" pitchFamily="34" charset="-122"/>
-              <a:cs typeface="Malgun Gothic" pitchFamily="34" charset="-120"/>
-            </a:endParaRPr>
-          </a:p>
-          <a:p>
-            <a:pPr>
+              <a:buNone/>
+            </a:pPr>
+            <a:r>
+              <a:rPr lang="en-US" sz="1250" dirty="0">
+                <a:solidFill>
+                  <a:srgbClr val="CADCFC"/>
+                </a:solidFill>
+                <a:latin typeface="Malgun Gothic" pitchFamily="34" charset="0"/>
+                <a:ea typeface="Malgun Gothic" pitchFamily="34" charset="-122"/>
+                <a:cs typeface="Malgun Gothic" pitchFamily="34" charset="-120"/>
+              </a:rPr>
+              <a:t>무엇을 만들어야 할지는</a:t>
+            </a:r>
+            <a:endParaRPr lang="en-US" sz="1250" dirty="0"/>
+          </a:p>
+          <a:p>
+            <a:pPr indent="0" marL="0">
               <a:lnSpc>
-                <a:spcPts val="3000"/>
+                <a:spcPts val="2000"/>
               </a:lnSpc>
-            </a:pPr>
-            <a:r>
-              <a:rPr lang="ko-KR" altLang="en-US" sz="2000" dirty="0">
-                <a:solidFill>
-                  <a:srgbClr val="FFFFFF"/>
-                </a:solidFill>
-                <a:latin typeface="Malgun Gothic" pitchFamily="34" charset="0"/>
-                <a:ea typeface="Malgun Gothic" pitchFamily="34" charset="-122"/>
-                <a:cs typeface="Malgun Gothic" pitchFamily="34" charset="-120"/>
-              </a:rPr>
-              <a:t>개선하고자 했습니다</a:t>
-            </a:r>
-            <a:r>
-              <a:rPr lang="en-US" altLang="ko-KR" sz="2000" dirty="0">
-                <a:solidFill>
-                  <a:srgbClr val="FFFFFF"/>
-                </a:solidFill>
-                <a:latin typeface="Malgun Gothic" pitchFamily="34" charset="0"/>
-                <a:ea typeface="Malgun Gothic" pitchFamily="34" charset="-122"/>
-                <a:cs typeface="Malgun Gothic" pitchFamily="34" charset="-120"/>
-              </a:rPr>
-              <a:t>.</a:t>
-            </a:r>
-            <a:endParaRPr lang="en-US" sz="2000" dirty="0"/>
+              <a:buNone/>
+            </a:pPr>
+            <a:r>
+              <a:rPr lang="en-US" sz="1250" dirty="0">
+                <a:solidFill>
+                  <a:srgbClr val="CADCFC"/>
+                </a:solidFill>
+                <a:latin typeface="Malgun Gothic" pitchFamily="34" charset="0"/>
+                <a:ea typeface="Malgun Gothic" pitchFamily="34" charset="-122"/>
+                <a:cs typeface="Malgun Gothic" pitchFamily="34" charset="-120"/>
+              </a:rPr>
+              <a:t>이미 알고 있었다</a:t>
+            </a:r>
+            <a:endParaRPr lang="en-US" sz="1250" dirty="0"/>
           </a:p>
         </p:txBody>
       </p:sp>
@@ -2561,7 +2504,6 @@
         <a:solidFill>
           <a:srgbClr val="F4F6FB"/>
         </a:solidFill>
-        <a:effectLst/>
       </p:bgPr>
     </p:bg>
     <p:spTree>
@@ -2599,7 +2541,7 @@
           <a:bodyPr wrap="square" lIns="0" tIns="0" rIns="0" bIns="0" rtlCol="0" anchor="ctr"/>
           <a:lstStyle/>
           <a:p>
-            <a:pPr marL="0" indent="0">
+            <a:pPr indent="0" marL="0">
               <a:buNone/>
             </a:pPr>
             <a:r>
@@ -2643,20 +2585,13 @@
             <a:prstDash val="solid"/>
           </a:ln>
           <a:effectLst>
-            <a:outerShdw blurRad="127000" dist="25400" dir="5400000" algn="bl" rotWithShape="0">
+            <a:outerShdw sx="100000" sy="100000" kx="0" ky="0" algn="bl" rotWithShape="0" blurRad="127000" dist="25400" dir="5400000">
               <a:srgbClr val="1E2761">
                 <a:alpha val="10000"/>
               </a:srgbClr>
             </a:outerShdw>
           </a:effectLst>
         </p:spPr>
-        <p:txBody>
-          <a:bodyPr/>
-          <a:lstStyle/>
-          <a:p>
-            <a:endParaRPr lang="ko-KR" altLang="en-US"/>
-          </a:p>
-        </p:txBody>
       </p:sp>
       <p:sp>
         <p:nvSpPr>
@@ -2679,7 +2614,7 @@
           <a:bodyPr wrap="square" lIns="0" tIns="0" rIns="0" bIns="0" rtlCol="0" anchor="ctr"/>
           <a:lstStyle/>
           <a:p>
-            <a:pPr marL="0" indent="0">
+            <a:pPr indent="0" marL="0">
               <a:lnSpc>
                 <a:spcPts val="2600"/>
               </a:lnSpc>
@@ -2694,12 +2629,12 @@
                 <a:ea typeface="Malgun Gothic" pitchFamily="34" charset="-122"/>
                 <a:cs typeface="Malgun Gothic" pitchFamily="34" charset="-120"/>
               </a:rPr>
-              <a:t>국회에서 내려온 국정감사 질의서를 AI가 분석해 담당 실·국·과를 분류하고,</a:t>
+              <a:t>국회에서 내려온 질의서(서면질문·국정감사 등)를 AI가 분석해 담당 실·국·과를</a:t>
             </a:r>
             <a:endParaRPr lang="en-US" sz="1600" dirty="0"/>
           </a:p>
           <a:p>
-            <a:pPr marL="0" indent="0">
+            <a:pPr indent="0" marL="0">
               <a:lnSpc>
                 <a:spcPts val="2600"/>
               </a:lnSpc>
@@ -2714,7 +2649,7 @@
                 <a:ea typeface="Malgun Gothic" pitchFamily="34" charset="-122"/>
                 <a:cs typeface="Malgun Gothic" pitchFamily="34" charset="-120"/>
               </a:rPr>
-              <a:t>해당 부서가 쓸 답변 초안까지 함께 만들어 주는 웹 서비스</a:t>
+              <a:t>분류하고, 해당 부서가 쓸 답변 초안까지 함께 만들어 주는 웹 서비스</a:t>
             </a:r>
             <a:endParaRPr lang="en-US" sz="1600" dirty="0"/>
           </a:p>
@@ -2741,7 +2676,7 @@
           <a:bodyPr wrap="square" lIns="0" tIns="0" rIns="0" bIns="0" rtlCol="0" anchor="ctr"/>
           <a:lstStyle/>
           <a:p>
-            <a:pPr marL="0" indent="0">
+            <a:pPr indent="0" marL="0">
               <a:buNone/>
             </a:pPr>
             <a:r>
@@ -2785,20 +2720,13 @@
             <a:prstDash val="solid"/>
           </a:ln>
           <a:effectLst>
-            <a:outerShdw blurRad="127000" dist="25400" dir="5400000" algn="bl" rotWithShape="0">
+            <a:outerShdw sx="100000" sy="100000" kx="0" ky="0" algn="bl" rotWithShape="0" blurRad="127000" dist="25400" dir="5400000">
               <a:srgbClr val="1E2761">
                 <a:alpha val="10000"/>
               </a:srgbClr>
             </a:outerShdw>
           </a:effectLst>
         </p:spPr>
-        <p:txBody>
-          <a:bodyPr/>
-          <a:lstStyle/>
-          <a:p>
-            <a:endParaRPr lang="ko-KR" altLang="en-US"/>
-          </a:p>
-        </p:txBody>
       </p:sp>
       <p:sp>
         <p:nvSpPr>
@@ -2824,13 +2752,6 @@
             <a:prstDash val="solid"/>
           </a:ln>
         </p:spPr>
-        <p:txBody>
-          <a:bodyPr/>
-          <a:lstStyle/>
-          <a:p>
-            <a:endParaRPr lang="ko-KR" altLang="en-US"/>
-          </a:p>
-        </p:txBody>
       </p:sp>
       <p:sp>
         <p:nvSpPr>
@@ -2853,7 +2774,7 @@
           <a:bodyPr wrap="square" lIns="0" tIns="0" rIns="0" bIns="0" rtlCol="0" anchor="ctr"/>
           <a:lstStyle/>
           <a:p>
-            <a:pPr marL="0" indent="0" algn="ctr">
+            <a:pPr algn="ctr" indent="0" marL="0">
               <a:buNone/>
             </a:pPr>
             <a:r>
@@ -2892,7 +2813,7 @@
           <a:bodyPr wrap="square" lIns="0" tIns="0" rIns="0" bIns="0" rtlCol="0" anchor="ctr"/>
           <a:lstStyle/>
           <a:p>
-            <a:pPr marL="0" indent="0">
+            <a:pPr indent="0" marL="0">
               <a:buNone/>
             </a:pPr>
             <a:r>
@@ -2931,7 +2852,7 @@
           <a:bodyPr wrap="square" lIns="0" tIns="0" rIns="0" bIns="0" rtlCol="0" anchor="ctr"/>
           <a:lstStyle/>
           <a:p>
-            <a:pPr marL="0" indent="0">
+            <a:pPr indent="0" marL="0">
               <a:lnSpc>
                 <a:spcPts val="1600"/>
               </a:lnSpc>
@@ -2978,20 +2899,13 @@
             <a:prstDash val="solid"/>
           </a:ln>
           <a:effectLst>
-            <a:outerShdw blurRad="127000" dist="25400" dir="5400000" algn="bl" rotWithShape="0">
+            <a:outerShdw sx="100000" sy="100000" kx="0" ky="0" algn="bl" rotWithShape="0" blurRad="127000" dist="25400" dir="5400000">
               <a:srgbClr val="1E2761">
                 <a:alpha val="10000"/>
               </a:srgbClr>
             </a:outerShdw>
           </a:effectLst>
         </p:spPr>
-        <p:txBody>
-          <a:bodyPr/>
-          <a:lstStyle/>
-          <a:p>
-            <a:endParaRPr lang="ko-KR" altLang="en-US"/>
-          </a:p>
-        </p:txBody>
       </p:sp>
       <p:sp>
         <p:nvSpPr>
@@ -3017,13 +2931,6 @@
             <a:prstDash val="solid"/>
           </a:ln>
         </p:spPr>
-        <p:txBody>
-          <a:bodyPr/>
-          <a:lstStyle/>
-          <a:p>
-            <a:endParaRPr lang="ko-KR" altLang="en-US"/>
-          </a:p>
-        </p:txBody>
       </p:sp>
       <p:sp>
         <p:nvSpPr>
@@ -3046,7 +2953,7 @@
           <a:bodyPr wrap="square" lIns="0" tIns="0" rIns="0" bIns="0" rtlCol="0" anchor="ctr"/>
           <a:lstStyle/>
           <a:p>
-            <a:pPr marL="0" indent="0" algn="ctr">
+            <a:pPr algn="ctr" indent="0" marL="0">
               <a:buNone/>
             </a:pPr>
             <a:r>
@@ -3085,7 +2992,7 @@
           <a:bodyPr wrap="square" lIns="0" tIns="0" rIns="0" bIns="0" rtlCol="0" anchor="ctr"/>
           <a:lstStyle/>
           <a:p>
-            <a:pPr marL="0" indent="0">
+            <a:pPr indent="0" marL="0">
               <a:buNone/>
             </a:pPr>
             <a:r>
@@ -3124,7 +3031,7 @@
           <a:bodyPr wrap="square" lIns="0" tIns="0" rIns="0" bIns="0" rtlCol="0" anchor="ctr"/>
           <a:lstStyle/>
           <a:p>
-            <a:pPr marL="0" indent="0">
+            <a:pPr indent="0" marL="0">
               <a:lnSpc>
                 <a:spcPts val="1600"/>
               </a:lnSpc>
@@ -3171,20 +3078,13 @@
             <a:prstDash val="solid"/>
           </a:ln>
           <a:effectLst>
-            <a:outerShdw blurRad="127000" dist="25400" dir="5400000" algn="bl" rotWithShape="0">
+            <a:outerShdw sx="100000" sy="100000" kx="0" ky="0" algn="bl" rotWithShape="0" blurRad="127000" dist="25400" dir="5400000">
               <a:srgbClr val="1E2761">
                 <a:alpha val="10000"/>
               </a:srgbClr>
             </a:outerShdw>
           </a:effectLst>
         </p:spPr>
-        <p:txBody>
-          <a:bodyPr/>
-          <a:lstStyle/>
-          <a:p>
-            <a:endParaRPr lang="ko-KR" altLang="en-US"/>
-          </a:p>
-        </p:txBody>
       </p:sp>
       <p:sp>
         <p:nvSpPr>
@@ -3210,13 +3110,6 @@
             <a:prstDash val="solid"/>
           </a:ln>
         </p:spPr>
-        <p:txBody>
-          <a:bodyPr/>
-          <a:lstStyle/>
-          <a:p>
-            <a:endParaRPr lang="ko-KR" altLang="en-US"/>
-          </a:p>
-        </p:txBody>
       </p:sp>
       <p:sp>
         <p:nvSpPr>
@@ -3239,7 +3132,7 @@
           <a:bodyPr wrap="square" lIns="0" tIns="0" rIns="0" bIns="0" rtlCol="0" anchor="ctr"/>
           <a:lstStyle/>
           <a:p>
-            <a:pPr marL="0" indent="0" algn="ctr">
+            <a:pPr algn="ctr" indent="0" marL="0">
               <a:buNone/>
             </a:pPr>
             <a:r>
@@ -3278,7 +3171,7 @@
           <a:bodyPr wrap="square" lIns="0" tIns="0" rIns="0" bIns="0" rtlCol="0" anchor="ctr"/>
           <a:lstStyle/>
           <a:p>
-            <a:pPr marL="0" indent="0">
+            <a:pPr indent="0" marL="0">
               <a:buNone/>
             </a:pPr>
             <a:r>
@@ -3317,7 +3210,7 @@
           <a:bodyPr wrap="square" lIns="0" tIns="0" rIns="0" bIns="0" rtlCol="0" anchor="ctr"/>
           <a:lstStyle/>
           <a:p>
-            <a:pPr marL="0" indent="0">
+            <a:pPr indent="0" marL="0">
               <a:lnSpc>
                 <a:spcPts val="1600"/>
               </a:lnSpc>
@@ -3364,20 +3257,13 @@
             <a:prstDash val="solid"/>
           </a:ln>
           <a:effectLst>
-            <a:outerShdw blurRad="127000" dist="25400" dir="5400000" algn="bl" rotWithShape="0">
+            <a:outerShdw sx="100000" sy="100000" kx="0" ky="0" algn="bl" rotWithShape="0" blurRad="127000" dist="25400" dir="5400000">
               <a:srgbClr val="1E2761">
                 <a:alpha val="10000"/>
               </a:srgbClr>
             </a:outerShdw>
           </a:effectLst>
         </p:spPr>
-        <p:txBody>
-          <a:bodyPr/>
-          <a:lstStyle/>
-          <a:p>
-            <a:endParaRPr lang="ko-KR" altLang="en-US"/>
-          </a:p>
-        </p:txBody>
       </p:sp>
       <p:sp>
         <p:nvSpPr>
@@ -3403,13 +3289,6 @@
             <a:prstDash val="solid"/>
           </a:ln>
         </p:spPr>
-        <p:txBody>
-          <a:bodyPr/>
-          <a:lstStyle/>
-          <a:p>
-            <a:endParaRPr lang="ko-KR" altLang="en-US"/>
-          </a:p>
-        </p:txBody>
       </p:sp>
       <p:sp>
         <p:nvSpPr>
@@ -3432,7 +3311,7 @@
           <a:bodyPr wrap="square" lIns="0" tIns="0" rIns="0" bIns="0" rtlCol="0" anchor="ctr"/>
           <a:lstStyle/>
           <a:p>
-            <a:pPr marL="0" indent="0" algn="ctr">
+            <a:pPr algn="ctr" indent="0" marL="0">
               <a:buNone/>
             </a:pPr>
             <a:r>
@@ -3471,7 +3350,7 @@
           <a:bodyPr wrap="square" lIns="0" tIns="0" rIns="0" bIns="0" rtlCol="0" anchor="ctr"/>
           <a:lstStyle/>
           <a:p>
-            <a:pPr marL="0" indent="0">
+            <a:pPr indent="0" marL="0">
               <a:buNone/>
             </a:pPr>
             <a:r>
@@ -3510,7 +3389,7 @@
           <a:bodyPr wrap="square" lIns="0" tIns="0" rIns="0" bIns="0" rtlCol="0" anchor="ctr"/>
           <a:lstStyle/>
           <a:p>
-            <a:pPr marL="0" indent="0">
+            <a:pPr indent="0" marL="0">
               <a:lnSpc>
                 <a:spcPts val="1600"/>
               </a:lnSpc>
@@ -3557,20 +3436,13 @@
             <a:prstDash val="solid"/>
           </a:ln>
           <a:effectLst>
-            <a:outerShdw blurRad="127000" dist="25400" dir="5400000" algn="bl" rotWithShape="0">
+            <a:outerShdw sx="100000" sy="100000" kx="0" ky="0" algn="bl" rotWithShape="0" blurRad="127000" dist="25400" dir="5400000">
               <a:srgbClr val="1E2761">
                 <a:alpha val="10000"/>
               </a:srgbClr>
             </a:outerShdw>
           </a:effectLst>
         </p:spPr>
-        <p:txBody>
-          <a:bodyPr/>
-          <a:lstStyle/>
-          <a:p>
-            <a:endParaRPr lang="ko-KR" altLang="en-US"/>
-          </a:p>
-        </p:txBody>
       </p:sp>
       <p:sp>
         <p:nvSpPr>
@@ -3596,13 +3468,6 @@
             <a:prstDash val="solid"/>
           </a:ln>
         </p:spPr>
-        <p:txBody>
-          <a:bodyPr/>
-          <a:lstStyle/>
-          <a:p>
-            <a:endParaRPr lang="ko-KR" altLang="en-US"/>
-          </a:p>
-        </p:txBody>
       </p:sp>
       <p:sp>
         <p:nvSpPr>
@@ -3625,7 +3490,7 @@
           <a:bodyPr wrap="square" lIns="0" tIns="0" rIns="0" bIns="0" rtlCol="0" anchor="ctr"/>
           <a:lstStyle/>
           <a:p>
-            <a:pPr marL="0" indent="0" algn="ctr">
+            <a:pPr algn="ctr" indent="0" marL="0">
               <a:buNone/>
             </a:pPr>
             <a:r>
@@ -3664,7 +3529,7 @@
           <a:bodyPr wrap="square" lIns="0" tIns="0" rIns="0" bIns="0" rtlCol="0" anchor="ctr"/>
           <a:lstStyle/>
           <a:p>
-            <a:pPr marL="0" indent="0">
+            <a:pPr indent="0" marL="0">
               <a:buNone/>
             </a:pPr>
             <a:r>
@@ -3703,7 +3568,7 @@
           <a:bodyPr wrap="square" lIns="0" tIns="0" rIns="0" bIns="0" rtlCol="0" anchor="ctr"/>
           <a:lstStyle/>
           <a:p>
-            <a:pPr marL="0" indent="0">
+            <a:pPr indent="0" marL="0">
               <a:lnSpc>
                 <a:spcPts val="1600"/>
               </a:lnSpc>
@@ -3721,6 +3586,45 @@
               <a:t>수정 후 이력에 기록</a:t>
             </a:r>
             <a:endParaRPr lang="en-US" sz="1150" dirty="0"/>
+          </a:p>
+        </p:txBody>
+      </p:sp>
+      <p:sp>
+        <p:nvSpPr>
+          <p:cNvPr id="31" name="Text 29"/>
+          <p:cNvSpPr/>
+          <p:nvPr/>
+        </p:nvSpPr>
+        <p:spPr>
+          <a:xfrm>
+            <a:off x="685800" y="5943600"/>
+            <a:ext cx="10789920" cy="365760"/>
+          </a:xfrm>
+          <a:prstGeom prst="rect">
+            <a:avLst/>
+          </a:prstGeom>
+          <a:noFill/>
+          <a:ln/>
+        </p:spPr>
+        <p:txBody>
+          <a:bodyPr wrap="square" lIns="0" tIns="0" rIns="0" bIns="0" rtlCol="0" anchor="ctr"/>
+          <a:lstStyle/>
+          <a:p>
+            <a:pPr indent="0" marL="0">
+              <a:buNone/>
+            </a:pPr>
+            <a:r>
+              <a:rPr lang="en-US" sz="1350" b="1" i="1" dirty="0">
+                <a:solidFill>
+                  <a:srgbClr val="1E2761"/>
+                </a:solidFill>
+                <a:latin typeface="Malgun Gothic" pitchFamily="34" charset="0"/>
+                <a:ea typeface="Malgun Gothic" pitchFamily="34" charset="-122"/>
+                <a:cs typeface="Malgun Gothic" pitchFamily="34" charset="-120"/>
+              </a:rPr>
+              <a:t>최종 확정은 반드시 사람이 한다 — AI가 스스로 배정하지 않는다</a:t>
+            </a:r>
+            <a:endParaRPr lang="en-US" sz="1350" dirty="0"/>
           </a:p>
         </p:txBody>
       </p:sp>
@@ -3740,7 +3644,6 @@
         <a:solidFill>
           <a:srgbClr val="F4F6FB"/>
         </a:solidFill>
-        <a:effectLst/>
       </p:bgPr>
     </p:bg>
     <p:spTree>
@@ -3778,7 +3681,7 @@
           <a:bodyPr wrap="square" lIns="0" tIns="0" rIns="0" bIns="0" rtlCol="0" anchor="ctr"/>
           <a:lstStyle/>
           <a:p>
-            <a:pPr marL="0" indent="0">
+            <a:pPr indent="0" marL="0">
               <a:buNone/>
             </a:pPr>
             <a:r>
@@ -3793,6 +3696,45 @@
               <a:t>핵심 기능 2가지</a:t>
             </a:r>
             <a:endParaRPr lang="en-US" sz="3400" dirty="0"/>
+          </a:p>
+        </p:txBody>
+      </p:sp>
+      <p:sp>
+        <p:nvSpPr>
+          <p:cNvPr id="3" name="Text 1"/>
+          <p:cNvSpPr/>
+          <p:nvPr/>
+        </p:nvSpPr>
+        <p:spPr>
+          <a:xfrm>
+            <a:off x="685800" y="1207008"/>
+            <a:ext cx="10789920" cy="365760"/>
+          </a:xfrm>
+          <a:prstGeom prst="rect">
+            <a:avLst/>
+          </a:prstGeom>
+          <a:noFill/>
+          <a:ln/>
+        </p:spPr>
+        <p:txBody>
+          <a:bodyPr wrap="square" lIns="0" tIns="0" rIns="0" bIns="0" rtlCol="0" anchor="ctr"/>
+          <a:lstStyle/>
+          <a:p>
+            <a:pPr indent="0" marL="0">
+              <a:buNone/>
+            </a:pPr>
+            <a:r>
+              <a:rPr lang="en-US" sz="1400" dirty="0">
+                <a:solidFill>
+                  <a:srgbClr val="5C6579"/>
+                </a:solidFill>
+                <a:latin typeface="Malgun Gothic" pitchFamily="34" charset="0"/>
+                <a:ea typeface="Malgun Gothic" pitchFamily="34" charset="-122"/>
+                <a:cs typeface="Malgun Gothic" pitchFamily="34" charset="-120"/>
+              </a:rPr>
+              <a:t>기능을 늘리기보다, AI가 지켜야 할 규칙을 숫자로 정하는 데 집중했다</a:t>
+            </a:r>
+            <a:endParaRPr lang="en-US" sz="1400" dirty="0"/>
           </a:p>
         </p:txBody>
       </p:sp>
@@ -3822,20 +3764,13 @@
             <a:prstDash val="solid"/>
           </a:ln>
           <a:effectLst>
-            <a:outerShdw blurRad="127000" dist="25400" dir="5400000" algn="bl" rotWithShape="0">
+            <a:outerShdw sx="100000" sy="100000" kx="0" ky="0" algn="bl" rotWithShape="0" blurRad="127000" dist="25400" dir="5400000">
               <a:srgbClr val="1E2761">
                 <a:alpha val="10000"/>
               </a:srgbClr>
             </a:outerShdw>
           </a:effectLst>
         </p:spPr>
-        <p:txBody>
-          <a:bodyPr/>
-          <a:lstStyle/>
-          <a:p>
-            <a:endParaRPr lang="ko-KR" altLang="en-US"/>
-          </a:p>
-        </p:txBody>
       </p:sp>
       <p:sp>
         <p:nvSpPr>
@@ -3861,13 +3796,6 @@
             <a:prstDash val="solid"/>
           </a:ln>
         </p:spPr>
-        <p:txBody>
-          <a:bodyPr/>
-          <a:lstStyle/>
-          <a:p>
-            <a:endParaRPr lang="ko-KR" altLang="en-US"/>
-          </a:p>
-        </p:txBody>
       </p:sp>
       <p:sp>
         <p:nvSpPr>
@@ -3890,7 +3818,7 @@
           <a:bodyPr wrap="square" lIns="0" tIns="0" rIns="0" bIns="0" rtlCol="0" anchor="ctr"/>
           <a:lstStyle/>
           <a:p>
-            <a:pPr marL="0" indent="0" algn="ctr">
+            <a:pPr algn="ctr" indent="0" marL="0">
               <a:buNone/>
             </a:pPr>
             <a:r>
@@ -3929,7 +3857,7 @@
           <a:bodyPr wrap="square" lIns="0" tIns="0" rIns="0" bIns="0" rtlCol="0" anchor="ctr"/>
           <a:lstStyle/>
           <a:p>
-            <a:pPr marL="0" indent="0">
+            <a:pPr indent="0" marL="0">
               <a:buNone/>
             </a:pPr>
             <a:r>
@@ -3971,13 +3899,6 @@
             <a:prstDash val="solid"/>
           </a:ln>
         </p:spPr>
-        <p:txBody>
-          <a:bodyPr/>
-          <a:lstStyle/>
-          <a:p>
-            <a:endParaRPr lang="ko-KR" altLang="en-US"/>
-          </a:p>
-        </p:txBody>
       </p:sp>
       <p:sp>
         <p:nvSpPr>
@@ -3987,7 +3908,7 @@
         </p:nvSpPr>
         <p:spPr>
           <a:xfrm>
-            <a:off x="1399032" y="3008030"/>
+            <a:off x="1399032" y="3154680"/>
             <a:ext cx="4206240" cy="731520"/>
           </a:xfrm>
           <a:prstGeom prst="rect">
@@ -4000,7 +3921,7 @@
           <a:bodyPr wrap="square" lIns="0" tIns="0" rIns="0" bIns="0" rtlCol="0" anchor="ctr"/>
           <a:lstStyle/>
           <a:p>
-            <a:pPr marL="0" indent="0">
+            <a:pPr indent="0" marL="0">
               <a:lnSpc>
                 <a:spcPts val="1900"/>
               </a:lnSpc>
@@ -4045,13 +3966,6 @@
             <a:prstDash val="solid"/>
           </a:ln>
         </p:spPr>
-        <p:txBody>
-          <a:bodyPr/>
-          <a:lstStyle/>
-          <a:p>
-            <a:endParaRPr lang="ko-KR" altLang="en-US"/>
-          </a:p>
-        </p:txBody>
       </p:sp>
       <p:sp>
         <p:nvSpPr>
@@ -4061,7 +3975,7 @@
         </p:nvSpPr>
         <p:spPr>
           <a:xfrm>
-            <a:off x="1399032" y="4008698"/>
+            <a:off x="1399032" y="4069080"/>
             <a:ext cx="4206240" cy="731520"/>
           </a:xfrm>
           <a:prstGeom prst="rect">
@@ -4074,7 +3988,7 @@
           <a:bodyPr wrap="square" lIns="0" tIns="0" rIns="0" bIns="0" rtlCol="0" anchor="ctr"/>
           <a:lstStyle/>
           <a:p>
-            <a:pPr marL="0" indent="0">
+            <a:pPr indent="0" marL="0">
               <a:lnSpc>
                 <a:spcPts val="1900"/>
               </a:lnSpc>
@@ -4119,13 +4033,6 @@
             <a:prstDash val="solid"/>
           </a:ln>
         </p:spPr>
-        <p:txBody>
-          <a:bodyPr/>
-          <a:lstStyle/>
-          <a:p>
-            <a:endParaRPr lang="ko-KR" altLang="en-US"/>
-          </a:p>
-        </p:txBody>
       </p:sp>
       <p:sp>
         <p:nvSpPr>
@@ -4135,7 +4042,7 @@
         </p:nvSpPr>
         <p:spPr>
           <a:xfrm>
-            <a:off x="1399032" y="4810960"/>
+            <a:off x="1399032" y="4983480"/>
             <a:ext cx="4206240" cy="731520"/>
           </a:xfrm>
           <a:prstGeom prst="rect">
@@ -4148,7 +4055,7 @@
           <a:bodyPr wrap="square" lIns="0" tIns="0" rIns="0" bIns="0" rtlCol="0" anchor="ctr"/>
           <a:lstStyle/>
           <a:p>
-            <a:pPr marL="0" indent="0">
+            <a:pPr indent="0" marL="0">
               <a:lnSpc>
                 <a:spcPts val="1900"/>
               </a:lnSpc>
@@ -4195,20 +4102,13 @@
             <a:prstDash val="solid"/>
           </a:ln>
           <a:effectLst>
-            <a:outerShdw blurRad="127000" dist="25400" dir="5400000" algn="bl" rotWithShape="0">
+            <a:outerShdw sx="100000" sy="100000" kx="0" ky="0" algn="bl" rotWithShape="0" blurRad="127000" dist="25400" dir="5400000">
               <a:srgbClr val="1E2761">
                 <a:alpha val="10000"/>
               </a:srgbClr>
             </a:outerShdw>
           </a:effectLst>
         </p:spPr>
-        <p:txBody>
-          <a:bodyPr/>
-          <a:lstStyle/>
-          <a:p>
-            <a:endParaRPr lang="ko-KR" altLang="en-US"/>
-          </a:p>
-        </p:txBody>
       </p:sp>
       <p:sp>
         <p:nvSpPr>
@@ -4234,13 +4134,6 @@
             <a:prstDash val="solid"/>
           </a:ln>
         </p:spPr>
-        <p:txBody>
-          <a:bodyPr/>
-          <a:lstStyle/>
-          <a:p>
-            <a:endParaRPr lang="ko-KR" altLang="en-US"/>
-          </a:p>
-        </p:txBody>
       </p:sp>
       <p:sp>
         <p:nvSpPr>
@@ -4263,7 +4156,7 @@
           <a:bodyPr wrap="square" lIns="0" tIns="0" rIns="0" bIns="0" rtlCol="0" anchor="ctr"/>
           <a:lstStyle/>
           <a:p>
-            <a:pPr marL="0" indent="0" algn="ctr">
+            <a:pPr algn="ctr" indent="0" marL="0">
               <a:buNone/>
             </a:pPr>
             <a:r>
@@ -4302,7 +4195,7 @@
           <a:bodyPr wrap="square" lIns="0" tIns="0" rIns="0" bIns="0" rtlCol="0" anchor="ctr"/>
           <a:lstStyle/>
           <a:p>
-            <a:pPr marL="0" indent="0">
+            <a:pPr indent="0" marL="0">
               <a:buNone/>
             </a:pPr>
             <a:r>
@@ -4344,13 +4237,6 @@
             <a:prstDash val="solid"/>
           </a:ln>
         </p:spPr>
-        <p:txBody>
-          <a:bodyPr/>
-          <a:lstStyle/>
-          <a:p>
-            <a:endParaRPr lang="ko-KR" altLang="en-US"/>
-          </a:p>
-        </p:txBody>
       </p:sp>
       <p:sp>
         <p:nvSpPr>
@@ -4360,7 +4246,7 @@
         </p:nvSpPr>
         <p:spPr>
           <a:xfrm>
-            <a:off x="6931152" y="2982160"/>
+            <a:off x="6931152" y="3154680"/>
             <a:ext cx="4206240" cy="731520"/>
           </a:xfrm>
           <a:prstGeom prst="rect">
@@ -4373,7 +4259,7 @@
           <a:bodyPr wrap="square" lIns="0" tIns="0" rIns="0" bIns="0" rtlCol="0" anchor="ctr"/>
           <a:lstStyle/>
           <a:p>
-            <a:pPr marL="0" indent="0">
+            <a:pPr indent="0" marL="0">
               <a:lnSpc>
                 <a:spcPts val="1900"/>
               </a:lnSpc>
@@ -4418,13 +4304,6 @@
             <a:prstDash val="solid"/>
           </a:ln>
         </p:spPr>
-        <p:txBody>
-          <a:bodyPr/>
-          <a:lstStyle/>
-          <a:p>
-            <a:endParaRPr lang="ko-KR" altLang="en-US"/>
-          </a:p>
-        </p:txBody>
       </p:sp>
       <p:sp>
         <p:nvSpPr>
@@ -4434,7 +4313,7 @@
         </p:nvSpPr>
         <p:spPr>
           <a:xfrm>
-            <a:off x="6931152" y="3896560"/>
+            <a:off x="6931152" y="4069080"/>
             <a:ext cx="4206240" cy="731520"/>
           </a:xfrm>
           <a:prstGeom prst="rect">
@@ -4447,7 +4326,7 @@
           <a:bodyPr wrap="square" lIns="0" tIns="0" rIns="0" bIns="0" rtlCol="0" anchor="ctr"/>
           <a:lstStyle/>
           <a:p>
-            <a:pPr marL="0" indent="0">
+            <a:pPr indent="0" marL="0">
               <a:lnSpc>
                 <a:spcPts val="1900"/>
               </a:lnSpc>
@@ -4492,13 +4371,6 @@
             <a:prstDash val="solid"/>
           </a:ln>
         </p:spPr>
-        <p:txBody>
-          <a:bodyPr/>
-          <a:lstStyle/>
-          <a:p>
-            <a:endParaRPr lang="ko-KR" altLang="en-US"/>
-          </a:p>
-        </p:txBody>
       </p:sp>
       <p:sp>
         <p:nvSpPr>
@@ -4508,7 +4380,7 @@
         </p:nvSpPr>
         <p:spPr>
           <a:xfrm>
-            <a:off x="6931152" y="4810960"/>
+            <a:off x="6931152" y="4983480"/>
             <a:ext cx="4206240" cy="731520"/>
           </a:xfrm>
           <a:prstGeom prst="rect">
@@ -4521,7 +4393,7 @@
           <a:bodyPr wrap="square" lIns="0" tIns="0" rIns="0" bIns="0" rtlCol="0" anchor="ctr"/>
           <a:lstStyle/>
           <a:p>
-            <a:pPr marL="0" indent="0">
+            <a:pPr indent="0" marL="0">
               <a:lnSpc>
                 <a:spcPts val="1900"/>
               </a:lnSpc>
@@ -4536,40 +4408,7 @@
                 <a:ea typeface="Malgun Gothic" pitchFamily="34" charset="-122"/>
                 <a:cs typeface="Malgun Gothic" pitchFamily="34" charset="-120"/>
               </a:rPr>
-              <a:t>「초안입니다. 검토 후 사용하세요」 </a:t>
-            </a:r>
-            <a:r>
-              <a:rPr lang="en-US" sz="1300" dirty="0" err="1">
-                <a:solidFill>
-                  <a:srgbClr val="1B2138"/>
-                </a:solidFill>
-                <a:latin typeface="Malgun Gothic" pitchFamily="34" charset="0"/>
-                <a:ea typeface="Malgun Gothic" pitchFamily="34" charset="-122"/>
-                <a:cs typeface="Malgun Gothic" pitchFamily="34" charset="-120"/>
-              </a:rPr>
-              <a:t>문구</a:t>
-            </a:r>
-            <a:r>
-              <a:rPr lang="en-US" sz="1300" dirty="0">
-                <a:solidFill>
-                  <a:srgbClr val="1B2138"/>
-                </a:solidFill>
-                <a:latin typeface="Malgun Gothic" pitchFamily="34" charset="0"/>
-                <a:ea typeface="Malgun Gothic" pitchFamily="34" charset="-122"/>
-                <a:cs typeface="Malgun Gothic" pitchFamily="34" charset="-120"/>
-              </a:rPr>
-              <a:t> </a:t>
-            </a:r>
-            <a:r>
-              <a:rPr lang="ko-KR" altLang="en-US" sz="1300" dirty="0">
-                <a:solidFill>
-                  <a:srgbClr val="1B2138"/>
-                </a:solidFill>
-                <a:latin typeface="Malgun Gothic" pitchFamily="34" charset="0"/>
-                <a:ea typeface="Malgun Gothic" pitchFamily="34" charset="-122"/>
-                <a:cs typeface="Malgun Gothic" pitchFamily="34" charset="-120"/>
-              </a:rPr>
-              <a:t>삽입</a:t>
+              <a:t>「초안입니다. 검토 후 사용하세요」 문구를 코드로 강제 삽입</a:t>
             </a:r>
             <a:endParaRPr lang="en-US" sz="1300" dirty="0"/>
           </a:p>
@@ -4591,7 +4430,6 @@
         <a:solidFill>
           <a:srgbClr val="F4F6FB"/>
         </a:solidFill>
-        <a:effectLst/>
       </p:bgPr>
     </p:bg>
     <p:spTree>
@@ -4629,7 +4467,7 @@
           <a:bodyPr wrap="square" lIns="0" tIns="0" rIns="0" bIns="0" rtlCol="0" anchor="ctr"/>
           <a:lstStyle/>
           <a:p>
-            <a:pPr marL="0" indent="0">
+            <a:pPr indent="0" marL="0">
               <a:buNone/>
             </a:pPr>
             <a:r>
@@ -4668,7 +4506,7 @@
           <a:bodyPr wrap="square" lIns="0" tIns="0" rIns="0" bIns="0" rtlCol="0" anchor="ctr"/>
           <a:lstStyle/>
           <a:p>
-            <a:pPr marL="0" indent="0">
+            <a:pPr indent="0" marL="0">
               <a:buNone/>
             </a:pPr>
             <a:r>
@@ -4712,20 +4550,13 @@
             <a:prstDash val="solid"/>
           </a:ln>
           <a:effectLst>
-            <a:outerShdw blurRad="127000" dist="25400" dir="5400000" algn="bl" rotWithShape="0">
+            <a:outerShdw sx="100000" sy="100000" kx="0" ky="0" algn="bl" rotWithShape="0" blurRad="127000" dist="25400" dir="5400000">
               <a:srgbClr val="1E2761">
                 <a:alpha val="10000"/>
               </a:srgbClr>
             </a:outerShdw>
           </a:effectLst>
         </p:spPr>
-        <p:txBody>
-          <a:bodyPr/>
-          <a:lstStyle/>
-          <a:p>
-            <a:endParaRPr lang="ko-KR" altLang="en-US"/>
-          </a:p>
-        </p:txBody>
       </p:sp>
       <p:sp>
         <p:nvSpPr>
@@ -4751,13 +4582,6 @@
             <a:prstDash val="solid"/>
           </a:ln>
         </p:spPr>
-        <p:txBody>
-          <a:bodyPr/>
-          <a:lstStyle/>
-          <a:p>
-            <a:endParaRPr lang="ko-KR" altLang="en-US"/>
-          </a:p>
-        </p:txBody>
       </p:sp>
       <p:sp>
         <p:nvSpPr>
@@ -4780,7 +4604,7 @@
           <a:bodyPr wrap="square" lIns="0" tIns="0" rIns="0" bIns="0" rtlCol="0" anchor="ctr"/>
           <a:lstStyle/>
           <a:p>
-            <a:pPr marL="0" indent="0" algn="ctr">
+            <a:pPr algn="ctr" indent="0" marL="0">
               <a:buNone/>
             </a:pPr>
             <a:r>
@@ -4819,7 +4643,7 @@
           <a:bodyPr wrap="square" lIns="0" tIns="0" rIns="0" bIns="0" rtlCol="0" anchor="ctr"/>
           <a:lstStyle/>
           <a:p>
-            <a:pPr marL="0" indent="0">
+            <a:pPr indent="0" marL="0">
               <a:buNone/>
             </a:pPr>
             <a:r>
@@ -4858,14 +4682,14 @@
           <a:bodyPr wrap="square" lIns="0" tIns="0" rIns="0" bIns="0" rtlCol="0" anchor="ctr"/>
           <a:lstStyle/>
           <a:p>
-            <a:pPr marL="0" indent="0">
+            <a:pPr indent="0" marL="0">
               <a:lnSpc>
                 <a:spcPts val="1600"/>
               </a:lnSpc>
               <a:buNone/>
             </a:pPr>
             <a:r>
-              <a:rPr lang="en-US" sz="1400" dirty="0">
+              <a:rPr lang="en-US" sz="1150" dirty="0">
                 <a:solidFill>
                   <a:srgbClr val="5C6579"/>
                 </a:solidFill>
@@ -4875,7 +4699,7 @@
               </a:rPr>
               <a:t>화면과 서버 코드를 한 프로젝트에서 함께 처리</a:t>
             </a:r>
-            <a:endParaRPr lang="en-US" sz="1400" dirty="0"/>
+            <a:endParaRPr lang="en-US" sz="1150" dirty="0"/>
           </a:p>
         </p:txBody>
       </p:sp>
@@ -4905,20 +4729,13 @@
             <a:prstDash val="solid"/>
           </a:ln>
           <a:effectLst>
-            <a:outerShdw blurRad="127000" dist="25400" dir="5400000" algn="bl" rotWithShape="0">
+            <a:outerShdw sx="100000" sy="100000" kx="0" ky="0" algn="bl" rotWithShape="0" blurRad="127000" dist="25400" dir="5400000">
               <a:srgbClr val="1E2761">
                 <a:alpha val="10000"/>
               </a:srgbClr>
             </a:outerShdw>
           </a:effectLst>
         </p:spPr>
-        <p:txBody>
-          <a:bodyPr/>
-          <a:lstStyle/>
-          <a:p>
-            <a:endParaRPr lang="ko-KR" altLang="en-US"/>
-          </a:p>
-        </p:txBody>
       </p:sp>
       <p:sp>
         <p:nvSpPr>
@@ -4944,13 +4761,6 @@
             <a:prstDash val="solid"/>
           </a:ln>
         </p:spPr>
-        <p:txBody>
-          <a:bodyPr/>
-          <a:lstStyle/>
-          <a:p>
-            <a:endParaRPr lang="ko-KR" altLang="en-US"/>
-          </a:p>
-        </p:txBody>
       </p:sp>
       <p:sp>
         <p:nvSpPr>
@@ -4973,7 +4783,7 @@
           <a:bodyPr wrap="square" lIns="0" tIns="0" rIns="0" bIns="0" rtlCol="0" anchor="ctr"/>
           <a:lstStyle/>
           <a:p>
-            <a:pPr marL="0" indent="0" algn="ctr">
+            <a:pPr algn="ctr" indent="0" marL="0">
               <a:buNone/>
             </a:pPr>
             <a:r>
@@ -5012,7 +4822,7 @@
           <a:bodyPr wrap="square" lIns="0" tIns="0" rIns="0" bIns="0" rtlCol="0" anchor="ctr"/>
           <a:lstStyle/>
           <a:p>
-            <a:pPr marL="0" indent="0">
+            <a:pPr indent="0" marL="0">
               <a:buNone/>
             </a:pPr>
             <a:r>
@@ -5051,14 +4861,14 @@
           <a:bodyPr wrap="square" lIns="0" tIns="0" rIns="0" bIns="0" rtlCol="0" anchor="ctr"/>
           <a:lstStyle/>
           <a:p>
-            <a:pPr marL="0" indent="0">
+            <a:pPr indent="0" marL="0">
               <a:lnSpc>
                 <a:spcPts val="1600"/>
               </a:lnSpc>
               <a:buNone/>
             </a:pPr>
             <a:r>
-              <a:rPr lang="en-US" sz="1400" dirty="0">
+              <a:rPr lang="en-US" sz="1150" dirty="0">
                 <a:solidFill>
                   <a:srgbClr val="5C6579"/>
                 </a:solidFill>
@@ -5068,7 +4878,7 @@
               </a:rPr>
               <a:t>실서비스 배포 · main 반영 시 자동 재배포</a:t>
             </a:r>
-            <a:endParaRPr lang="en-US" sz="1400" dirty="0"/>
+            <a:endParaRPr lang="en-US" sz="1150" dirty="0"/>
           </a:p>
         </p:txBody>
       </p:sp>
@@ -5098,20 +4908,13 @@
             <a:prstDash val="solid"/>
           </a:ln>
           <a:effectLst>
-            <a:outerShdw blurRad="127000" dist="25400" dir="5400000" algn="bl" rotWithShape="0">
+            <a:outerShdw sx="100000" sy="100000" kx="0" ky="0" algn="bl" rotWithShape="0" blurRad="127000" dist="25400" dir="5400000">
               <a:srgbClr val="1E2761">
                 <a:alpha val="10000"/>
               </a:srgbClr>
             </a:outerShdw>
           </a:effectLst>
         </p:spPr>
-        <p:txBody>
-          <a:bodyPr/>
-          <a:lstStyle/>
-          <a:p>
-            <a:endParaRPr lang="ko-KR" altLang="en-US"/>
-          </a:p>
-        </p:txBody>
       </p:sp>
       <p:sp>
         <p:nvSpPr>
@@ -5137,13 +4940,6 @@
             <a:prstDash val="solid"/>
           </a:ln>
         </p:spPr>
-        <p:txBody>
-          <a:bodyPr/>
-          <a:lstStyle/>
-          <a:p>
-            <a:endParaRPr lang="ko-KR" altLang="en-US"/>
-          </a:p>
-        </p:txBody>
       </p:sp>
       <p:sp>
         <p:nvSpPr>
@@ -5166,7 +4962,7 @@
           <a:bodyPr wrap="square" lIns="0" tIns="0" rIns="0" bIns="0" rtlCol="0" anchor="ctr"/>
           <a:lstStyle/>
           <a:p>
-            <a:pPr marL="0" indent="0" algn="ctr">
+            <a:pPr algn="ctr" indent="0" marL="0">
               <a:buNone/>
             </a:pPr>
             <a:r>
@@ -5205,7 +5001,7 @@
           <a:bodyPr wrap="square" lIns="0" tIns="0" rIns="0" bIns="0" rtlCol="0" anchor="ctr"/>
           <a:lstStyle/>
           <a:p>
-            <a:pPr marL="0" indent="0">
+            <a:pPr indent="0" marL="0">
               <a:buNone/>
             </a:pPr>
             <a:r>
@@ -5244,14 +5040,14 @@
           <a:bodyPr wrap="square" lIns="0" tIns="0" rIns="0" bIns="0" rtlCol="0" anchor="ctr"/>
           <a:lstStyle/>
           <a:p>
-            <a:pPr marL="0" indent="0">
+            <a:pPr indent="0" marL="0">
               <a:lnSpc>
                 <a:spcPts val="1600"/>
               </a:lnSpc>
               <a:buNone/>
             </a:pPr>
             <a:r>
-              <a:rPr lang="en-US" sz="1400" dirty="0">
+              <a:rPr lang="en-US" sz="1150" dirty="0">
                 <a:solidFill>
                   <a:srgbClr val="5C6579"/>
                 </a:solidFill>
@@ -5261,7 +5057,7 @@
               </a:rPr>
               <a:t>처리한 질의서와 답변 초안 이력 저장</a:t>
             </a:r>
-            <a:endParaRPr lang="en-US" sz="1400" dirty="0"/>
+            <a:endParaRPr lang="en-US" sz="1150" dirty="0"/>
           </a:p>
         </p:txBody>
       </p:sp>
@@ -5291,20 +5087,13 @@
             <a:prstDash val="solid"/>
           </a:ln>
           <a:effectLst>
-            <a:outerShdw blurRad="127000" dist="25400" dir="5400000" algn="bl" rotWithShape="0">
+            <a:outerShdw sx="100000" sy="100000" kx="0" ky="0" algn="bl" rotWithShape="0" blurRad="127000" dist="25400" dir="5400000">
               <a:srgbClr val="1E2761">
                 <a:alpha val="10000"/>
               </a:srgbClr>
             </a:outerShdw>
           </a:effectLst>
         </p:spPr>
-        <p:txBody>
-          <a:bodyPr/>
-          <a:lstStyle/>
-          <a:p>
-            <a:endParaRPr lang="ko-KR" altLang="en-US"/>
-          </a:p>
-        </p:txBody>
       </p:sp>
       <p:sp>
         <p:nvSpPr>
@@ -5330,13 +5119,6 @@
             <a:prstDash val="solid"/>
           </a:ln>
         </p:spPr>
-        <p:txBody>
-          <a:bodyPr/>
-          <a:lstStyle/>
-          <a:p>
-            <a:endParaRPr lang="ko-KR" altLang="en-US"/>
-          </a:p>
-        </p:txBody>
       </p:sp>
       <p:sp>
         <p:nvSpPr>
@@ -5359,7 +5141,7 @@
           <a:bodyPr wrap="square" lIns="0" tIns="0" rIns="0" bIns="0" rtlCol="0" anchor="ctr"/>
           <a:lstStyle/>
           <a:p>
-            <a:pPr marL="0" indent="0" algn="ctr">
+            <a:pPr algn="ctr" indent="0" marL="0">
               <a:buNone/>
             </a:pPr>
             <a:r>
@@ -5398,7 +5180,7 @@
           <a:bodyPr wrap="square" lIns="0" tIns="0" rIns="0" bIns="0" rtlCol="0" anchor="ctr"/>
           <a:lstStyle/>
           <a:p>
-            <a:pPr marL="0" indent="0">
+            <a:pPr indent="0" marL="0">
               <a:buNone/>
             </a:pPr>
             <a:r>
@@ -5437,14 +5219,14 @@
           <a:bodyPr wrap="square" lIns="0" tIns="0" rIns="0" bIns="0" rtlCol="0" anchor="ctr"/>
           <a:lstStyle/>
           <a:p>
-            <a:pPr marL="0" indent="0">
+            <a:pPr indent="0" marL="0">
               <a:lnSpc>
                 <a:spcPts val="1600"/>
               </a:lnSpc>
               <a:buNone/>
             </a:pPr>
             <a:r>
-              <a:rPr lang="en-US" sz="1400" dirty="0">
+              <a:rPr lang="en-US" sz="1150" dirty="0">
                 <a:solidFill>
                   <a:srgbClr val="5C6579"/>
                 </a:solidFill>
@@ -5454,7 +5236,7 @@
               </a:rPr>
               <a:t>부서 분류 판단과 답변 초안 작성</a:t>
             </a:r>
-            <a:endParaRPr lang="en-US" sz="1400" dirty="0"/>
+            <a:endParaRPr lang="en-US" sz="1150" dirty="0"/>
           </a:p>
         </p:txBody>
       </p:sp>
@@ -5484,20 +5266,13 @@
             <a:prstDash val="solid"/>
           </a:ln>
           <a:effectLst>
-            <a:outerShdw blurRad="127000" dist="25400" dir="5400000" algn="bl" rotWithShape="0">
+            <a:outerShdw sx="100000" sy="100000" kx="0" ky="0" algn="bl" rotWithShape="0" blurRad="127000" dist="25400" dir="5400000">
               <a:srgbClr val="1E2761">
                 <a:alpha val="10000"/>
               </a:srgbClr>
             </a:outerShdw>
           </a:effectLst>
         </p:spPr>
-        <p:txBody>
-          <a:bodyPr/>
-          <a:lstStyle/>
-          <a:p>
-            <a:endParaRPr lang="ko-KR" altLang="en-US"/>
-          </a:p>
-        </p:txBody>
       </p:sp>
       <p:sp>
         <p:nvSpPr>
@@ -5523,13 +5298,6 @@
             <a:prstDash val="solid"/>
           </a:ln>
         </p:spPr>
-        <p:txBody>
-          <a:bodyPr/>
-          <a:lstStyle/>
-          <a:p>
-            <a:endParaRPr lang="ko-KR" altLang="en-US"/>
-          </a:p>
-        </p:txBody>
       </p:sp>
       <p:sp>
         <p:nvSpPr>
@@ -5552,7 +5320,7 @@
           <a:bodyPr wrap="square" lIns="0" tIns="0" rIns="0" bIns="0" rtlCol="0" anchor="ctr"/>
           <a:lstStyle/>
           <a:p>
-            <a:pPr marL="0" indent="0" algn="ctr">
+            <a:pPr algn="ctr" indent="0" marL="0">
               <a:buNone/>
             </a:pPr>
             <a:r>
@@ -5591,7 +5359,7 @@
           <a:bodyPr wrap="square" lIns="0" tIns="0" rIns="0" bIns="0" rtlCol="0" anchor="ctr"/>
           <a:lstStyle/>
           <a:p>
-            <a:pPr marL="0" indent="0">
+            <a:pPr indent="0" marL="0">
               <a:buNone/>
             </a:pPr>
             <a:r>
@@ -5630,14 +5398,14 @@
           <a:bodyPr wrap="square" lIns="0" tIns="0" rIns="0" bIns="0" rtlCol="0" anchor="ctr"/>
           <a:lstStyle/>
           <a:p>
-            <a:pPr marL="0" indent="0">
+            <a:pPr indent="0" marL="0">
               <a:lnSpc>
                 <a:spcPts val="1600"/>
               </a:lnSpc>
               <a:buNone/>
             </a:pPr>
             <a:r>
-              <a:rPr lang="en-US" sz="1400" dirty="0">
+              <a:rPr lang="en-US" sz="1150" dirty="0">
                 <a:solidFill>
                   <a:srgbClr val="5C6579"/>
                 </a:solidFill>
@@ -5647,7 +5415,7 @@
               </a:rPr>
               <a:t>과거 서면질의답변서 조회</a:t>
             </a:r>
-            <a:endParaRPr lang="en-US" sz="1400" dirty="0"/>
+            <a:endParaRPr lang="en-US" sz="1150" dirty="0"/>
           </a:p>
         </p:txBody>
       </p:sp>
@@ -5677,20 +5445,13 @@
             <a:prstDash val="solid"/>
           </a:ln>
           <a:effectLst>
-            <a:outerShdw blurRad="127000" dist="25400" dir="5400000" algn="bl" rotWithShape="0">
+            <a:outerShdw sx="100000" sy="100000" kx="0" ky="0" algn="bl" rotWithShape="0" blurRad="127000" dist="25400" dir="5400000">
               <a:srgbClr val="1E2761">
                 <a:alpha val="10000"/>
               </a:srgbClr>
             </a:outerShdw>
           </a:effectLst>
         </p:spPr>
-        <p:txBody>
-          <a:bodyPr/>
-          <a:lstStyle/>
-          <a:p>
-            <a:endParaRPr lang="ko-KR" altLang="en-US"/>
-          </a:p>
-        </p:txBody>
       </p:sp>
       <p:sp>
         <p:nvSpPr>
@@ -5716,13 +5477,6 @@
             <a:prstDash val="solid"/>
           </a:ln>
         </p:spPr>
-        <p:txBody>
-          <a:bodyPr/>
-          <a:lstStyle/>
-          <a:p>
-            <a:endParaRPr lang="ko-KR" altLang="en-US"/>
-          </a:p>
-        </p:txBody>
       </p:sp>
       <p:sp>
         <p:nvSpPr>
@@ -5745,7 +5499,7 @@
           <a:bodyPr wrap="square" lIns="0" tIns="0" rIns="0" bIns="0" rtlCol="0" anchor="ctr"/>
           <a:lstStyle/>
           <a:p>
-            <a:pPr marL="0" indent="0" algn="ctr">
+            <a:pPr algn="ctr" indent="0" marL="0">
               <a:buNone/>
             </a:pPr>
             <a:r>
@@ -5784,7 +5538,7 @@
           <a:bodyPr wrap="square" lIns="0" tIns="0" rIns="0" bIns="0" rtlCol="0" anchor="ctr"/>
           <a:lstStyle/>
           <a:p>
-            <a:pPr marL="0" indent="0">
+            <a:pPr indent="0" marL="0">
               <a:buNone/>
             </a:pPr>
             <a:r>
@@ -5823,14 +5577,14 @@
           <a:bodyPr wrap="square" lIns="0" tIns="0" rIns="0" bIns="0" rtlCol="0" anchor="ctr"/>
           <a:lstStyle/>
           <a:p>
-            <a:pPr marL="0" indent="0">
+            <a:pPr indent="0" marL="0">
               <a:lnSpc>
                 <a:spcPts val="1600"/>
               </a:lnSpc>
               <a:buNone/>
             </a:pPr>
             <a:r>
-              <a:rPr lang="en-US" sz="1400" dirty="0">
+              <a:rPr lang="en-US" sz="1150" dirty="0">
                 <a:solidFill>
                   <a:srgbClr val="5C6579"/>
                 </a:solidFill>
@@ -5840,7 +5594,7 @@
               </a:rPr>
               <a:t>PDF · HWPX 파일에서 본문 텍스트 추출</a:t>
             </a:r>
-            <a:endParaRPr lang="en-US" sz="1400" dirty="0"/>
+            <a:endParaRPr lang="en-US" sz="1150" dirty="0"/>
           </a:p>
         </p:txBody>
       </p:sp>
@@ -5860,7 +5614,6 @@
         <a:solidFill>
           <a:srgbClr val="F4F6FB"/>
         </a:solidFill>
-        <a:effectLst/>
       </p:bgPr>
     </p:bg>
     <p:spTree>
@@ -5898,7 +5651,7 @@
           <a:bodyPr wrap="square" lIns="0" tIns="0" rIns="0" bIns="0" rtlCol="0" anchor="ctr"/>
           <a:lstStyle/>
           <a:p>
-            <a:pPr marL="0" indent="0">
+            <a:pPr indent="0" marL="0">
               <a:buNone/>
             </a:pPr>
             <a:r>
@@ -5942,20 +5695,13 @@
             <a:prstDash val="solid"/>
           </a:ln>
           <a:effectLst>
-            <a:outerShdw blurRad="127000" dist="25400" dir="5400000" algn="bl" rotWithShape="0">
+            <a:outerShdw sx="100000" sy="100000" kx="0" ky="0" algn="bl" rotWithShape="0" blurRad="127000" dist="25400" dir="5400000">
               <a:srgbClr val="1E2761">
                 <a:alpha val="10000"/>
               </a:srgbClr>
             </a:outerShdw>
           </a:effectLst>
         </p:spPr>
-        <p:txBody>
-          <a:bodyPr/>
-          <a:lstStyle/>
-          <a:p>
-            <a:endParaRPr lang="ko-KR" altLang="en-US"/>
-          </a:p>
-        </p:txBody>
       </p:sp>
       <p:sp>
         <p:nvSpPr>
@@ -5978,7 +5724,7 @@
           <a:bodyPr wrap="square" lIns="0" tIns="0" rIns="0" bIns="0" rtlCol="0" anchor="ctr"/>
           <a:lstStyle/>
           <a:p>
-            <a:pPr marL="0" indent="0">
+            <a:pPr indent="0" marL="0">
               <a:buNone/>
             </a:pPr>
             <a:r>
@@ -6017,7 +5763,7 @@
           <a:bodyPr wrap="square" lIns="0" tIns="0" rIns="0" bIns="0" rtlCol="0" anchor="ctr"/>
           <a:lstStyle/>
           <a:p>
-            <a:pPr marL="0" indent="0">
+            <a:pPr indent="0" marL="0">
               <a:buNone/>
             </a:pPr>
             <a:r>
@@ -6061,20 +5807,13 @@
             <a:prstDash val="solid"/>
           </a:ln>
           <a:effectLst>
-            <a:outerShdw blurRad="127000" dist="25400" dir="5400000" algn="bl" rotWithShape="0">
+            <a:outerShdw sx="100000" sy="100000" kx="0" ky="0" algn="bl" rotWithShape="0" blurRad="127000" dist="25400" dir="5400000">
               <a:srgbClr val="1E2761">
                 <a:alpha val="10000"/>
               </a:srgbClr>
             </a:outerShdw>
           </a:effectLst>
         </p:spPr>
-        <p:txBody>
-          <a:bodyPr/>
-          <a:lstStyle/>
-          <a:p>
-            <a:endParaRPr lang="ko-KR" altLang="en-US"/>
-          </a:p>
-        </p:txBody>
       </p:sp>
       <p:sp>
         <p:nvSpPr>
@@ -6097,7 +5836,7 @@
           <a:bodyPr wrap="square" lIns="0" tIns="0" rIns="0" bIns="0" rtlCol="0" anchor="ctr"/>
           <a:lstStyle/>
           <a:p>
-            <a:pPr marL="0" indent="0">
+            <a:pPr indent="0" marL="0">
               <a:buNone/>
             </a:pPr>
             <a:r>
@@ -6136,7 +5875,7 @@
           <a:bodyPr wrap="square" lIns="0" tIns="0" rIns="0" bIns="0" rtlCol="0" anchor="ctr"/>
           <a:lstStyle/>
           <a:p>
-            <a:pPr marL="0" indent="0">
+            <a:pPr indent="0" marL="0">
               <a:buNone/>
             </a:pPr>
             <a:r>
@@ -6180,20 +5919,13 @@
             <a:prstDash val="solid"/>
           </a:ln>
           <a:effectLst>
-            <a:outerShdw blurRad="127000" dist="25400" dir="5400000" algn="bl" rotWithShape="0">
+            <a:outerShdw sx="100000" sy="100000" kx="0" ky="0" algn="bl" rotWithShape="0" blurRad="127000" dist="25400" dir="5400000">
               <a:srgbClr val="1E2761">
                 <a:alpha val="10000"/>
               </a:srgbClr>
             </a:outerShdw>
           </a:effectLst>
         </p:spPr>
-        <p:txBody>
-          <a:bodyPr/>
-          <a:lstStyle/>
-          <a:p>
-            <a:endParaRPr lang="ko-KR" altLang="en-US"/>
-          </a:p>
-        </p:txBody>
       </p:sp>
       <p:sp>
         <p:nvSpPr>
@@ -6216,7 +5948,7 @@
           <a:bodyPr wrap="square" lIns="0" tIns="0" rIns="0" bIns="0" rtlCol="0" anchor="ctr"/>
           <a:lstStyle/>
           <a:p>
-            <a:pPr marL="0" indent="0">
+            <a:pPr indent="0" marL="0">
               <a:buNone/>
             </a:pPr>
             <a:r>
@@ -6255,7 +5987,7 @@
           <a:bodyPr wrap="square" lIns="0" tIns="0" rIns="0" bIns="0" rtlCol="0" anchor="ctr"/>
           <a:lstStyle/>
           <a:p>
-            <a:pPr marL="0" indent="0">
+            <a:pPr indent="0" marL="0">
               <a:buNone/>
             </a:pPr>
             <a:r>
@@ -6294,7 +6026,7 @@
           <a:bodyPr wrap="square" lIns="0" tIns="0" rIns="0" bIns="0" rtlCol="0" anchor="ctr"/>
           <a:lstStyle/>
           <a:p>
-            <a:pPr marL="0" indent="0">
+            <a:pPr indent="0" marL="0">
               <a:buNone/>
             </a:pPr>
             <a:r>
@@ -6333,11 +6065,11 @@
           <a:bodyPr wrap="square" lIns="0" tIns="0" rIns="0" bIns="0" rtlCol="0" anchor="ctr"/>
           <a:lstStyle/>
           <a:p>
-            <a:pPr marL="0" indent="0">
-              <a:buNone/>
-            </a:pPr>
-            <a:r>
-              <a:rPr lang="en-US" dirty="0">
+            <a:pPr indent="0" marL="0">
+              <a:buNone/>
+            </a:pPr>
+            <a:r>
+              <a:rPr lang="en-US" sz="1350" dirty="0">
                 <a:solidFill>
                   <a:srgbClr val="1B2138"/>
                 </a:solidFill>
@@ -6347,7 +6079,7 @@
               </a:rPr>
               <a:t>기획 문서 4종 작성 — 간단 기획서에서 시작해 PRD · 계획 · 설계로 확장</a:t>
             </a:r>
-            <a:endParaRPr lang="en-US" dirty="0"/>
+            <a:endParaRPr lang="en-US" sz="1350" dirty="0"/>
           </a:p>
         </p:txBody>
       </p:sp>
@@ -6372,7 +6104,7 @@
           <a:bodyPr wrap="square" lIns="0" tIns="0" rIns="0" bIns="0" rtlCol="0" anchor="ctr"/>
           <a:lstStyle/>
           <a:p>
-            <a:pPr marL="0" indent="0">
+            <a:pPr indent="0" marL="0">
               <a:buNone/>
             </a:pPr>
             <a:r>
@@ -6411,11 +6143,11 @@
           <a:bodyPr wrap="square" lIns="0" tIns="0" rIns="0" bIns="0" rtlCol="0" anchor="ctr"/>
           <a:lstStyle/>
           <a:p>
-            <a:pPr marL="0" indent="0">
-              <a:buNone/>
-            </a:pPr>
-            <a:r>
-              <a:rPr lang="en-US" dirty="0">
+            <a:pPr indent="0" marL="0">
+              <a:buNone/>
+            </a:pPr>
+            <a:r>
+              <a:rPr lang="en-US" sz="1350" dirty="0">
                 <a:solidFill>
                   <a:srgbClr val="1B2138"/>
                 </a:solidFill>
@@ -6425,7 +6157,7 @@
               </a:rPr>
               <a:t>질의서 분류 · 답변 초안 생성 기능 구현, 배포 환경에서 동작 확인</a:t>
             </a:r>
-            <a:endParaRPr lang="en-US" dirty="0"/>
+            <a:endParaRPr lang="en-US" sz="1350" dirty="0"/>
           </a:p>
         </p:txBody>
       </p:sp>
@@ -6450,7 +6182,7 @@
           <a:bodyPr wrap="square" lIns="0" tIns="0" rIns="0" bIns="0" rtlCol="0" anchor="ctr"/>
           <a:lstStyle/>
           <a:p>
-            <a:pPr marL="0" indent="0">
+            <a:pPr indent="0" marL="0">
               <a:buNone/>
             </a:pPr>
             <a:r>
@@ -6489,11 +6221,11 @@
           <a:bodyPr wrap="square" lIns="0" tIns="0" rIns="0" bIns="0" rtlCol="0" anchor="ctr"/>
           <a:lstStyle/>
           <a:p>
-            <a:pPr marL="0" indent="0">
-              <a:buNone/>
-            </a:pPr>
-            <a:r>
-              <a:rPr lang="en-US" dirty="0">
+            <a:pPr indent="0" marL="0">
+              <a:buNone/>
+            </a:pPr>
+            <a:r>
+              <a:rPr lang="en-US" sz="1350" dirty="0">
                 <a:solidFill>
                   <a:srgbClr val="1B2138"/>
                 </a:solidFill>
@@ -6503,7 +6235,7 @@
               </a:rPr>
               <a:t>열린국회정보 API 연동 — 과거 서면질의답변서 조회 및 PDF 본문 추출</a:t>
             </a:r>
-            <a:endParaRPr lang="en-US" dirty="0"/>
+            <a:endParaRPr lang="en-US" sz="1350" dirty="0"/>
           </a:p>
         </p:txBody>
       </p:sp>
@@ -6528,7 +6260,7 @@
           <a:bodyPr wrap="square" lIns="0" tIns="0" rIns="0" bIns="0" rtlCol="0" anchor="ctr"/>
           <a:lstStyle/>
           <a:p>
-            <a:pPr marL="0" indent="0">
+            <a:pPr indent="0" marL="0">
               <a:buNone/>
             </a:pPr>
             <a:r>
@@ -6567,11 +6299,11 @@
           <a:bodyPr wrap="square" lIns="0" tIns="0" rIns="0" bIns="0" rtlCol="0" anchor="ctr"/>
           <a:lstStyle/>
           <a:p>
-            <a:pPr marL="0" indent="0">
-              <a:buNone/>
-            </a:pPr>
-            <a:r>
-              <a:rPr lang="en-US" dirty="0">
+            <a:pPr indent="0" marL="0">
+              <a:buNone/>
+            </a:pPr>
+            <a:r>
+              <a:rPr lang="en-US" sz="1350" dirty="0">
                 <a:solidFill>
                   <a:srgbClr val="1B2138"/>
                 </a:solidFill>
@@ -6581,7 +6313,7 @@
               </a:rPr>
               <a:t>Supabase 연동 — 확정한 부서와 답변 초안을 처리 이력으로 저장</a:t>
             </a:r>
-            <a:endParaRPr lang="en-US" dirty="0"/>
+            <a:endParaRPr lang="en-US" sz="1350" dirty="0"/>
           </a:p>
         </p:txBody>
       </p:sp>
@@ -6606,7 +6338,7 @@
           <a:bodyPr wrap="square" lIns="0" tIns="0" rIns="0" bIns="0" rtlCol="0" anchor="ctr"/>
           <a:lstStyle/>
           <a:p>
-            <a:pPr marL="0" indent="0">
+            <a:pPr indent="0" marL="0">
               <a:buNone/>
             </a:pPr>
             <a:r>
@@ -6645,11 +6377,11 @@
           <a:bodyPr wrap="square" lIns="0" tIns="0" rIns="0" bIns="0" rtlCol="0" anchor="ctr"/>
           <a:lstStyle/>
           <a:p>
-            <a:pPr marL="0" indent="0">
-              <a:buNone/>
-            </a:pPr>
-            <a:r>
-              <a:rPr lang="en-US" dirty="0">
+            <a:pPr indent="0" marL="0">
+              <a:buNone/>
+            </a:pPr>
+            <a:r>
+              <a:rPr lang="en-US" sz="1350" dirty="0">
                 <a:solidFill>
                   <a:srgbClr val="1B2138"/>
                 </a:solidFill>
@@ -6659,7 +6391,7 @@
               </a:rPr>
               <a:t>GitHub · Vercel 연결 — main 브랜치에 반영하면 자동 재배포</a:t>
             </a:r>
-            <a:endParaRPr lang="en-US" dirty="0"/>
+            <a:endParaRPr lang="en-US" sz="1350" dirty="0"/>
           </a:p>
         </p:txBody>
       </p:sp>
@@ -6689,20 +6421,13 @@
             <a:prstDash val="solid"/>
           </a:ln>
           <a:effectLst>
-            <a:outerShdw blurRad="127000" dist="25400" dir="5400000" algn="bl" rotWithShape="0">
+            <a:outerShdw sx="100000" sy="100000" kx="0" ky="0" algn="bl" rotWithShape="0" blurRad="127000" dist="25400" dir="5400000">
               <a:srgbClr val="1E2761">
                 <a:alpha val="10000"/>
               </a:srgbClr>
             </a:outerShdw>
           </a:effectLst>
         </p:spPr>
-        <p:txBody>
-          <a:bodyPr/>
-          <a:lstStyle/>
-          <a:p>
-            <a:endParaRPr lang="ko-KR" altLang="en-US"/>
-          </a:p>
-        </p:txBody>
       </p:sp>
       <p:sp>
         <p:nvSpPr>
@@ -6725,7 +6450,7 @@
           <a:bodyPr wrap="square" lIns="0" tIns="0" rIns="0" bIns="0" rtlCol="0" anchor="ctr"/>
           <a:lstStyle/>
           <a:p>
-            <a:pPr marL="0" indent="0">
+            <a:pPr indent="0" marL="0">
               <a:buNone/>
             </a:pPr>
             <a:r>
@@ -6739,6 +6464,9 @@
               </a:rPr>
               <a:t>서비스 주소   </a:t>
             </a:r>
+            <a:pPr indent="0" marL="0">
+              <a:buNone/>
+            </a:pPr>
             <a:r>
               <a:rPr lang="en-US" sz="1500" b="1" dirty="0">
                 <a:solidFill>
@@ -6747,7 +6475,6 @@
                 <a:latin typeface="Malgun Gothic" pitchFamily="34" charset="0"/>
                 <a:ea typeface="Malgun Gothic" pitchFamily="34" charset="-122"/>
                 <a:cs typeface="Malgun Gothic" pitchFamily="34" charset="-120"/>
-                <a:hlinkClick r:id="rId3"/>
               </a:rPr>
               <a:t>assembly-qna.vercel.app</a:t>
             </a:r>
@@ -6765,13 +6492,12 @@
 
 <file path=ppt/slides/slide7.xml><?xml version="1.0" encoding="utf-8"?>
 <p:sld xmlns:a="http://schemas.openxmlformats.org/drawingml/2006/main" xmlns:r="http://schemas.openxmlformats.org/officeDocument/2006/relationships" xmlns:p="http://schemas.openxmlformats.org/presentationml/2006/main">
-  <p:cSld name="Slide 8">
+  <p:cSld name="Slide 7">
     <p:bg>
       <p:bgPr>
         <a:solidFill>
-          <a:srgbClr val="1E2761"/>
+          <a:srgbClr val="F4F6FB"/>
         </a:solidFill>
-        <a:effectLst/>
       </p:bgPr>
     </p:bg>
     <p:spTree>
@@ -6790,6 +6516,692 @@
       </p:grpSpPr>
       <p:sp>
         <p:nvSpPr>
+          <p:cNvPr id="2" name="Text 0"/>
+          <p:cNvSpPr/>
+          <p:nvPr/>
+        </p:nvSpPr>
+        <p:spPr>
+          <a:xfrm>
+            <a:off x="685800" y="457200"/>
+            <a:ext cx="10789920" cy="731520"/>
+          </a:xfrm>
+          <a:prstGeom prst="rect">
+            <a:avLst/>
+          </a:prstGeom>
+          <a:noFill/>
+          <a:ln/>
+        </p:spPr>
+        <p:txBody>
+          <a:bodyPr wrap="square" lIns="0" tIns="0" rIns="0" bIns="0" rtlCol="0" anchor="ctr"/>
+          <a:lstStyle/>
+          <a:p>
+            <a:pPr indent="0" marL="0">
+              <a:buNone/>
+            </a:pPr>
+            <a:r>
+              <a:rPr lang="en-US" sz="3400" b="1" dirty="0">
+                <a:solidFill>
+                  <a:srgbClr val="1B2138"/>
+                </a:solidFill>
+                <a:latin typeface="Malgun Gothic" pitchFamily="34" charset="0"/>
+                <a:ea typeface="Malgun Gothic" pitchFamily="34" charset="-122"/>
+                <a:cs typeface="Malgun Gothic" pitchFamily="34" charset="-120"/>
+              </a:rPr>
+              <a:t>지금의 한계</a:t>
+            </a:r>
+            <a:endParaRPr lang="en-US" sz="3400" dirty="0"/>
+          </a:p>
+        </p:txBody>
+      </p:sp>
+      <p:sp>
+        <p:nvSpPr>
+          <p:cNvPr id="3" name="Text 1"/>
+          <p:cNvSpPr/>
+          <p:nvPr/>
+        </p:nvSpPr>
+        <p:spPr>
+          <a:xfrm>
+            <a:off x="685800" y="1207008"/>
+            <a:ext cx="10789920" cy="365760"/>
+          </a:xfrm>
+          <a:prstGeom prst="rect">
+            <a:avLst/>
+          </a:prstGeom>
+          <a:noFill/>
+          <a:ln/>
+        </p:spPr>
+        <p:txBody>
+          <a:bodyPr wrap="square" lIns="0" tIns="0" rIns="0" bIns="0" rtlCol="0" anchor="ctr"/>
+          <a:lstStyle/>
+          <a:p>
+            <a:pPr indent="0" marL="0">
+              <a:buNone/>
+            </a:pPr>
+            <a:r>
+              <a:rPr lang="en-US" sz="1400" dirty="0">
+                <a:solidFill>
+                  <a:srgbClr val="5C6579"/>
+                </a:solidFill>
+                <a:latin typeface="Malgun Gothic" pitchFamily="34" charset="0"/>
+                <a:ea typeface="Malgun Gothic" pitchFamily="34" charset="-122"/>
+                <a:cs typeface="Malgun Gothic" pitchFamily="34" charset="-120"/>
+              </a:rPr>
+              <a:t>만들면서 확인한, 아직 풀지 못한 문제들</a:t>
+            </a:r>
+            <a:endParaRPr lang="en-US" sz="1400" dirty="0"/>
+          </a:p>
+        </p:txBody>
+      </p:sp>
+      <p:sp>
+        <p:nvSpPr>
+          <p:cNvPr id="4" name="Shape 2"/>
+          <p:cNvSpPr/>
+          <p:nvPr/>
+        </p:nvSpPr>
+        <p:spPr>
+          <a:xfrm>
+            <a:off x="685800" y="1828800"/>
+            <a:ext cx="10789920" cy="1143000"/>
+          </a:xfrm>
+          <a:prstGeom prst="roundRect">
+            <a:avLst>
+              <a:gd name="adj" fmla="val 8000"/>
+            </a:avLst>
+          </a:prstGeom>
+          <a:solidFill>
+            <a:srgbClr val="FFFFFF"/>
+          </a:solidFill>
+          <a:ln w="12700">
+            <a:solidFill>
+              <a:srgbClr val="CADCFC"/>
+            </a:solidFill>
+            <a:prstDash val="solid"/>
+          </a:ln>
+          <a:effectLst>
+            <a:outerShdw sx="100000" sy="100000" kx="0" ky="0" algn="bl" rotWithShape="0" blurRad="127000" dist="25400" dir="5400000">
+              <a:srgbClr val="1E2761">
+                <a:alpha val="10000"/>
+              </a:srgbClr>
+            </a:outerShdw>
+          </a:effectLst>
+        </p:spPr>
+      </p:sp>
+      <p:sp>
+        <p:nvSpPr>
+          <p:cNvPr id="5" name="Shape 3"/>
+          <p:cNvSpPr/>
+          <p:nvPr/>
+        </p:nvSpPr>
+        <p:spPr>
+          <a:xfrm>
+            <a:off x="1005840" y="2148840"/>
+            <a:ext cx="457200" cy="457200"/>
+          </a:xfrm>
+          <a:prstGeom prst="ellipse">
+            <a:avLst/>
+          </a:prstGeom>
+          <a:solidFill>
+            <a:srgbClr val="D9A441"/>
+          </a:solidFill>
+          <a:ln w="12700">
+            <a:solidFill>
+              <a:srgbClr val="D9A441"/>
+            </a:solidFill>
+            <a:prstDash val="solid"/>
+          </a:ln>
+        </p:spPr>
+      </p:sp>
+      <p:sp>
+        <p:nvSpPr>
+          <p:cNvPr id="6" name="Text 4"/>
+          <p:cNvSpPr/>
+          <p:nvPr/>
+        </p:nvSpPr>
+        <p:spPr>
+          <a:xfrm>
+            <a:off x="1005840" y="2148840"/>
+            <a:ext cx="457200" cy="457200"/>
+          </a:xfrm>
+          <a:prstGeom prst="rect">
+            <a:avLst/>
+          </a:prstGeom>
+          <a:noFill/>
+          <a:ln/>
+        </p:spPr>
+        <p:txBody>
+          <a:bodyPr wrap="square" lIns="0" tIns="0" rIns="0" bIns="0" rtlCol="0" anchor="ctr"/>
+          <a:lstStyle/>
+          <a:p>
+            <a:pPr algn="ctr" indent="0" marL="0">
+              <a:buNone/>
+            </a:pPr>
+            <a:r>
+              <a:rPr lang="en-US" sz="1400" b="1" dirty="0">
+                <a:solidFill>
+                  <a:srgbClr val="FFFFFF"/>
+                </a:solidFill>
+                <a:latin typeface="Malgun Gothic" pitchFamily="34" charset="0"/>
+                <a:ea typeface="Malgun Gothic" pitchFamily="34" charset="-122"/>
+                <a:cs typeface="Malgun Gothic" pitchFamily="34" charset="-120"/>
+              </a:rPr>
+              <a:t>1</a:t>
+            </a:r>
+            <a:endParaRPr lang="en-US" sz="1400" dirty="0"/>
+          </a:p>
+        </p:txBody>
+      </p:sp>
+      <p:sp>
+        <p:nvSpPr>
+          <p:cNvPr id="7" name="Text 5"/>
+          <p:cNvSpPr/>
+          <p:nvPr/>
+        </p:nvSpPr>
+        <p:spPr>
+          <a:xfrm>
+            <a:off x="1645920" y="2011680"/>
+            <a:ext cx="9326880" cy="347472"/>
+          </a:xfrm>
+          <a:prstGeom prst="rect">
+            <a:avLst/>
+          </a:prstGeom>
+          <a:noFill/>
+          <a:ln/>
+        </p:spPr>
+        <p:txBody>
+          <a:bodyPr wrap="square" lIns="0" tIns="0" rIns="0" bIns="0" rtlCol="0" anchor="ctr"/>
+          <a:lstStyle/>
+          <a:p>
+            <a:pPr indent="0" marL="0">
+              <a:buNone/>
+            </a:pPr>
+            <a:r>
+              <a:rPr lang="en-US" sz="1600" b="1" dirty="0">
+                <a:solidFill>
+                  <a:srgbClr val="1B2138"/>
+                </a:solidFill>
+                <a:latin typeface="Malgun Gothic" pitchFamily="34" charset="0"/>
+                <a:ea typeface="Malgun Gothic" pitchFamily="34" charset="-122"/>
+                <a:cs typeface="Malgun Gothic" pitchFamily="34" charset="-120"/>
+              </a:rPr>
+              <a:t>실·국·과 단위 정답 데이터가 없다</a:t>
+            </a:r>
+            <a:endParaRPr lang="en-US" sz="1600" dirty="0"/>
+          </a:p>
+        </p:txBody>
+      </p:sp>
+      <p:sp>
+        <p:nvSpPr>
+          <p:cNvPr id="8" name="Text 6"/>
+          <p:cNvSpPr/>
+          <p:nvPr/>
+        </p:nvSpPr>
+        <p:spPr>
+          <a:xfrm>
+            <a:off x="1645920" y="2377440"/>
+            <a:ext cx="9509760" cy="502920"/>
+          </a:xfrm>
+          <a:prstGeom prst="rect">
+            <a:avLst/>
+          </a:prstGeom>
+          <a:noFill/>
+          <a:ln/>
+        </p:spPr>
+        <p:txBody>
+          <a:bodyPr wrap="square" lIns="0" tIns="0" rIns="0" bIns="0" rtlCol="0" anchor="ctr"/>
+          <a:lstStyle/>
+          <a:p>
+            <a:pPr indent="0" marL="0">
+              <a:lnSpc>
+                <a:spcPts val="1700"/>
+              </a:lnSpc>
+              <a:buNone/>
+            </a:pPr>
+            <a:r>
+              <a:rPr lang="en-US" sz="1250" dirty="0">
+                <a:solidFill>
+                  <a:srgbClr val="5C6579"/>
+                </a:solidFill>
+                <a:latin typeface="Malgun Gothic" pitchFamily="34" charset="0"/>
+                <a:ea typeface="Malgun Gothic" pitchFamily="34" charset="-122"/>
+                <a:cs typeface="Malgun Gothic" pitchFamily="34" charset="-120"/>
+              </a:rPr>
+              <a:t>열린국회정보가 주는 정보는 부처·위원회 단위까지다. 그 안의 어느 과가 처리했는지는 공개 데이터에 아예 없어서, 지금은 AI 추론에 기대고 있다.</a:t>
+            </a:r>
+            <a:endParaRPr lang="en-US" sz="1250" dirty="0"/>
+          </a:p>
+        </p:txBody>
+      </p:sp>
+      <p:sp>
+        <p:nvSpPr>
+          <p:cNvPr id="9" name="Shape 7"/>
+          <p:cNvSpPr/>
+          <p:nvPr/>
+        </p:nvSpPr>
+        <p:spPr>
+          <a:xfrm>
+            <a:off x="685800" y="3154680"/>
+            <a:ext cx="10789920" cy="1143000"/>
+          </a:xfrm>
+          <a:prstGeom prst="roundRect">
+            <a:avLst>
+              <a:gd name="adj" fmla="val 8000"/>
+            </a:avLst>
+          </a:prstGeom>
+          <a:solidFill>
+            <a:srgbClr val="FFFFFF"/>
+          </a:solidFill>
+          <a:ln w="12700">
+            <a:solidFill>
+              <a:srgbClr val="CADCFC"/>
+            </a:solidFill>
+            <a:prstDash val="solid"/>
+          </a:ln>
+          <a:effectLst>
+            <a:outerShdw sx="100000" sy="100000" kx="0" ky="0" algn="bl" rotWithShape="0" blurRad="127000" dist="25400" dir="5400000">
+              <a:srgbClr val="1E2761">
+                <a:alpha val="10000"/>
+              </a:srgbClr>
+            </a:outerShdw>
+          </a:effectLst>
+        </p:spPr>
+      </p:sp>
+      <p:sp>
+        <p:nvSpPr>
+          <p:cNvPr id="10" name="Shape 8"/>
+          <p:cNvSpPr/>
+          <p:nvPr/>
+        </p:nvSpPr>
+        <p:spPr>
+          <a:xfrm>
+            <a:off x="1005840" y="3474720"/>
+            <a:ext cx="457200" cy="457200"/>
+          </a:xfrm>
+          <a:prstGeom prst="ellipse">
+            <a:avLst/>
+          </a:prstGeom>
+          <a:solidFill>
+            <a:srgbClr val="D9A441"/>
+          </a:solidFill>
+          <a:ln w="12700">
+            <a:solidFill>
+              <a:srgbClr val="D9A441"/>
+            </a:solidFill>
+            <a:prstDash val="solid"/>
+          </a:ln>
+        </p:spPr>
+      </p:sp>
+      <p:sp>
+        <p:nvSpPr>
+          <p:cNvPr id="11" name="Text 9"/>
+          <p:cNvSpPr/>
+          <p:nvPr/>
+        </p:nvSpPr>
+        <p:spPr>
+          <a:xfrm>
+            <a:off x="1005840" y="3474720"/>
+            <a:ext cx="457200" cy="457200"/>
+          </a:xfrm>
+          <a:prstGeom prst="rect">
+            <a:avLst/>
+          </a:prstGeom>
+          <a:noFill/>
+          <a:ln/>
+        </p:spPr>
+        <p:txBody>
+          <a:bodyPr wrap="square" lIns="0" tIns="0" rIns="0" bIns="0" rtlCol="0" anchor="ctr"/>
+          <a:lstStyle/>
+          <a:p>
+            <a:pPr algn="ctr" indent="0" marL="0">
+              <a:buNone/>
+            </a:pPr>
+            <a:r>
+              <a:rPr lang="en-US" sz="1400" b="1" dirty="0">
+                <a:solidFill>
+                  <a:srgbClr val="FFFFFF"/>
+                </a:solidFill>
+                <a:latin typeface="Malgun Gothic" pitchFamily="34" charset="0"/>
+                <a:ea typeface="Malgun Gothic" pitchFamily="34" charset="-122"/>
+                <a:cs typeface="Malgun Gothic" pitchFamily="34" charset="-120"/>
+              </a:rPr>
+              <a:t>2</a:t>
+            </a:r>
+            <a:endParaRPr lang="en-US" sz="1400" dirty="0"/>
+          </a:p>
+        </p:txBody>
+      </p:sp>
+      <p:sp>
+        <p:nvSpPr>
+          <p:cNvPr id="12" name="Text 10"/>
+          <p:cNvSpPr/>
+          <p:nvPr/>
+        </p:nvSpPr>
+        <p:spPr>
+          <a:xfrm>
+            <a:off x="1645920" y="3337560"/>
+            <a:ext cx="9326880" cy="347472"/>
+          </a:xfrm>
+          <a:prstGeom prst="rect">
+            <a:avLst/>
+          </a:prstGeom>
+          <a:noFill/>
+          <a:ln/>
+        </p:spPr>
+        <p:txBody>
+          <a:bodyPr wrap="square" lIns="0" tIns="0" rIns="0" bIns="0" rtlCol="0" anchor="ctr"/>
+          <a:lstStyle/>
+          <a:p>
+            <a:pPr indent="0" marL="0">
+              <a:buNone/>
+            </a:pPr>
+            <a:r>
+              <a:rPr lang="en-US" sz="1600" b="1" dirty="0">
+                <a:solidFill>
+                  <a:srgbClr val="1B2138"/>
+                </a:solidFill>
+                <a:latin typeface="Malgun Gothic" pitchFamily="34" charset="0"/>
+                <a:ea typeface="Malgun Gothic" pitchFamily="34" charset="-122"/>
+                <a:cs typeface="Malgun Gothic" pitchFamily="34" charset="-120"/>
+              </a:rPr>
+              <a:t>유사 사례를 글자 겹침으로만 찾는다</a:t>
+            </a:r>
+            <a:endParaRPr lang="en-US" sz="1600" dirty="0"/>
+          </a:p>
+        </p:txBody>
+      </p:sp>
+      <p:sp>
+        <p:nvSpPr>
+          <p:cNvPr id="13" name="Text 11"/>
+          <p:cNvSpPr/>
+          <p:nvPr/>
+        </p:nvSpPr>
+        <p:spPr>
+          <a:xfrm>
+            <a:off x="1645920" y="3703320"/>
+            <a:ext cx="9509760" cy="502920"/>
+          </a:xfrm>
+          <a:prstGeom prst="rect">
+            <a:avLst/>
+          </a:prstGeom>
+          <a:noFill/>
+          <a:ln/>
+        </p:spPr>
+        <p:txBody>
+          <a:bodyPr wrap="square" lIns="0" tIns="0" rIns="0" bIns="0" rtlCol="0" anchor="ctr"/>
+          <a:lstStyle/>
+          <a:p>
+            <a:pPr indent="0" marL="0">
+              <a:lnSpc>
+                <a:spcPts val="1700"/>
+              </a:lnSpc>
+              <a:buNone/>
+            </a:pPr>
+            <a:r>
+              <a:rPr lang="en-US" sz="1250" dirty="0">
+                <a:solidFill>
+                  <a:srgbClr val="5C6579"/>
+                </a:solidFill>
+                <a:latin typeface="Malgun Gothic" pitchFamily="34" charset="0"/>
+                <a:ea typeface="Malgun Gothic" pitchFamily="34" charset="-122"/>
+                <a:cs typeface="Malgun Gothic" pitchFamily="34" charset="-120"/>
+              </a:rPr>
+              <a:t>제목에 같은 단어가 몇 개 겹치는지 세는 방식이라, 표현이 다르면 관련 있는 사례도 놓친다. 의미를 이해하는 검색이 아니다.</a:t>
+            </a:r>
+            <a:endParaRPr lang="en-US" sz="1250" dirty="0"/>
+          </a:p>
+        </p:txBody>
+      </p:sp>
+      <p:sp>
+        <p:nvSpPr>
+          <p:cNvPr id="14" name="Shape 12"/>
+          <p:cNvSpPr/>
+          <p:nvPr/>
+        </p:nvSpPr>
+        <p:spPr>
+          <a:xfrm>
+            <a:off x="685800" y="4480560"/>
+            <a:ext cx="10789920" cy="1143000"/>
+          </a:xfrm>
+          <a:prstGeom prst="roundRect">
+            <a:avLst>
+              <a:gd name="adj" fmla="val 8000"/>
+            </a:avLst>
+          </a:prstGeom>
+          <a:solidFill>
+            <a:srgbClr val="FFFFFF"/>
+          </a:solidFill>
+          <a:ln w="12700">
+            <a:solidFill>
+              <a:srgbClr val="CADCFC"/>
+            </a:solidFill>
+            <a:prstDash val="solid"/>
+          </a:ln>
+          <a:effectLst>
+            <a:outerShdw sx="100000" sy="100000" kx="0" ky="0" algn="bl" rotWithShape="0" blurRad="127000" dist="25400" dir="5400000">
+              <a:srgbClr val="1E2761">
+                <a:alpha val="10000"/>
+              </a:srgbClr>
+            </a:outerShdw>
+          </a:effectLst>
+        </p:spPr>
+      </p:sp>
+      <p:sp>
+        <p:nvSpPr>
+          <p:cNvPr id="15" name="Shape 13"/>
+          <p:cNvSpPr/>
+          <p:nvPr/>
+        </p:nvSpPr>
+        <p:spPr>
+          <a:xfrm>
+            <a:off x="1005840" y="4800600"/>
+            <a:ext cx="457200" cy="457200"/>
+          </a:xfrm>
+          <a:prstGeom prst="ellipse">
+            <a:avLst/>
+          </a:prstGeom>
+          <a:solidFill>
+            <a:srgbClr val="D9A441"/>
+          </a:solidFill>
+          <a:ln w="12700">
+            <a:solidFill>
+              <a:srgbClr val="D9A441"/>
+            </a:solidFill>
+            <a:prstDash val="solid"/>
+          </a:ln>
+        </p:spPr>
+      </p:sp>
+      <p:sp>
+        <p:nvSpPr>
+          <p:cNvPr id="16" name="Text 14"/>
+          <p:cNvSpPr/>
+          <p:nvPr/>
+        </p:nvSpPr>
+        <p:spPr>
+          <a:xfrm>
+            <a:off x="1005840" y="4800600"/>
+            <a:ext cx="457200" cy="457200"/>
+          </a:xfrm>
+          <a:prstGeom prst="rect">
+            <a:avLst/>
+          </a:prstGeom>
+          <a:noFill/>
+          <a:ln/>
+        </p:spPr>
+        <p:txBody>
+          <a:bodyPr wrap="square" lIns="0" tIns="0" rIns="0" bIns="0" rtlCol="0" anchor="ctr"/>
+          <a:lstStyle/>
+          <a:p>
+            <a:pPr algn="ctr" indent="0" marL="0">
+              <a:buNone/>
+            </a:pPr>
+            <a:r>
+              <a:rPr lang="en-US" sz="1400" b="1" dirty="0">
+                <a:solidFill>
+                  <a:srgbClr val="FFFFFF"/>
+                </a:solidFill>
+                <a:latin typeface="Malgun Gothic" pitchFamily="34" charset="0"/>
+                <a:ea typeface="Malgun Gothic" pitchFamily="34" charset="-122"/>
+                <a:cs typeface="Malgun Gothic" pitchFamily="34" charset="-120"/>
+              </a:rPr>
+              <a:t>3</a:t>
+            </a:r>
+            <a:endParaRPr lang="en-US" sz="1400" dirty="0"/>
+          </a:p>
+        </p:txBody>
+      </p:sp>
+      <p:sp>
+        <p:nvSpPr>
+          <p:cNvPr id="17" name="Text 15"/>
+          <p:cNvSpPr/>
+          <p:nvPr/>
+        </p:nvSpPr>
+        <p:spPr>
+          <a:xfrm>
+            <a:off x="1645920" y="4663440"/>
+            <a:ext cx="9326880" cy="347472"/>
+          </a:xfrm>
+          <a:prstGeom prst="rect">
+            <a:avLst/>
+          </a:prstGeom>
+          <a:noFill/>
+          <a:ln/>
+        </p:spPr>
+        <p:txBody>
+          <a:bodyPr wrap="square" lIns="0" tIns="0" rIns="0" bIns="0" rtlCol="0" anchor="ctr"/>
+          <a:lstStyle/>
+          <a:p>
+            <a:pPr indent="0" marL="0">
+              <a:buNone/>
+            </a:pPr>
+            <a:r>
+              <a:rPr lang="en-US" sz="1600" b="1" dirty="0">
+                <a:solidFill>
+                  <a:srgbClr val="1B2138"/>
+                </a:solidFill>
+                <a:latin typeface="Malgun Gothic" pitchFamily="34" charset="0"/>
+                <a:ea typeface="Malgun Gothic" pitchFamily="34" charset="-122"/>
+                <a:cs typeface="Malgun Gothic" pitchFamily="34" charset="-120"/>
+              </a:rPr>
+              <a:t>매 요청마다 외부 자료를 새로 가져온다</a:t>
+            </a:r>
+            <a:endParaRPr lang="en-US" sz="1600" dirty="0"/>
+          </a:p>
+        </p:txBody>
+      </p:sp>
+      <p:sp>
+        <p:nvSpPr>
+          <p:cNvPr id="18" name="Text 16"/>
+          <p:cNvSpPr/>
+          <p:nvPr/>
+        </p:nvSpPr>
+        <p:spPr>
+          <a:xfrm>
+            <a:off x="1645920" y="5029200"/>
+            <a:ext cx="9509760" cy="502920"/>
+          </a:xfrm>
+          <a:prstGeom prst="rect">
+            <a:avLst/>
+          </a:prstGeom>
+          <a:noFill/>
+          <a:ln/>
+        </p:spPr>
+        <p:txBody>
+          <a:bodyPr wrap="square" lIns="0" tIns="0" rIns="0" bIns="0" rtlCol="0" anchor="ctr"/>
+          <a:lstStyle/>
+          <a:p>
+            <a:pPr indent="0" marL="0">
+              <a:lnSpc>
+                <a:spcPts val="1700"/>
+              </a:lnSpc>
+              <a:buNone/>
+            </a:pPr>
+            <a:r>
+              <a:rPr lang="en-US" sz="1250" dirty="0">
+                <a:solidFill>
+                  <a:srgbClr val="5C6579"/>
+                </a:solidFill>
+                <a:latin typeface="Malgun Gothic" pitchFamily="34" charset="0"/>
+                <a:ea typeface="Malgun Gothic" pitchFamily="34" charset="-122"/>
+                <a:cs typeface="Malgun Gothic" pitchFamily="34" charset="-120"/>
+              </a:rPr>
+              <a:t>미리 모아둔 색인 없이 그때그때 API를 부르고 PDF를 내려받는다. 그래서 결과가 나오기까지 6~10초가 걸린다.</a:t>
+            </a:r>
+            <a:endParaRPr lang="en-US" sz="1250" dirty="0"/>
+          </a:p>
+        </p:txBody>
+      </p:sp>
+      <p:sp>
+        <p:nvSpPr>
+          <p:cNvPr id="19" name="Text 17"/>
+          <p:cNvSpPr/>
+          <p:nvPr/>
+        </p:nvSpPr>
+        <p:spPr>
+          <a:xfrm>
+            <a:off x="685800" y="5852160"/>
+            <a:ext cx="10789920" cy="365760"/>
+          </a:xfrm>
+          <a:prstGeom prst="rect">
+            <a:avLst/>
+          </a:prstGeom>
+          <a:noFill/>
+          <a:ln/>
+        </p:spPr>
+        <p:txBody>
+          <a:bodyPr wrap="square" lIns="0" tIns="0" rIns="0" bIns="0" rtlCol="0" anchor="ctr"/>
+          <a:lstStyle/>
+          <a:p>
+            <a:pPr indent="0" marL="0">
+              <a:buNone/>
+            </a:pPr>
+            <a:r>
+              <a:rPr lang="en-US" sz="1350" b="1" i="1" dirty="0">
+                <a:solidFill>
+                  <a:srgbClr val="1E2761"/>
+                </a:solidFill>
+                <a:latin typeface="Malgun Gothic" pitchFamily="34" charset="0"/>
+                <a:ea typeface="Malgun Gothic" pitchFamily="34" charset="-122"/>
+                <a:cs typeface="Malgun Gothic" pitchFamily="34" charset="-120"/>
+              </a:rPr>
+              <a:t>한계를 알고 있다는 것 자체가 다음에 무엇을 할지 정해준다</a:t>
+            </a:r>
+            <a:endParaRPr lang="en-US" sz="1350" dirty="0"/>
+          </a:p>
+        </p:txBody>
+      </p:sp>
+    </p:spTree>
+  </p:cSld>
+  <p:clrMapOvr>
+    <a:masterClrMapping/>
+  </p:clrMapOvr>
+</p:sld>
+</file>
+
+<file path=ppt/slides/slide8.xml><?xml version="1.0" encoding="utf-8"?>
+<p:sld xmlns:a="http://schemas.openxmlformats.org/drawingml/2006/main" xmlns:r="http://schemas.openxmlformats.org/officeDocument/2006/relationships" xmlns:p="http://schemas.openxmlformats.org/presentationml/2006/main">
+  <p:cSld name="Slide 8">
+    <p:bg>
+      <p:bgPr>
+        <a:solidFill>
+          <a:srgbClr val="1E2761"/>
+        </a:solidFill>
+      </p:bgPr>
+    </p:bg>
+    <p:spTree>
+      <p:nvGrpSpPr>
+        <p:cNvPr id="1" name=""/>
+        <p:cNvGrpSpPr/>
+        <p:nvPr/>
+      </p:nvGrpSpPr>
+      <p:grpSpPr>
+        <a:xfrm>
+          <a:off x="0" y="0"/>
+          <a:ext cx="0" cy="0"/>
+          <a:chOff x="0" y="0"/>
+          <a:chExt cx="0" cy="0"/>
+        </a:xfrm>
+      </p:grpSpPr>
+      <p:sp>
+        <p:nvSpPr>
           <p:cNvPr id="2" name="Shape 0"/>
           <p:cNvSpPr/>
           <p:nvPr/>
@@ -6816,13 +7228,6 @@
             <a:prstDash val="solid"/>
           </a:ln>
         </p:spPr>
-        <p:txBody>
-          <a:bodyPr/>
-          <a:lstStyle/>
-          <a:p>
-            <a:endParaRPr lang="ko-KR" altLang="en-US"/>
-          </a:p>
-        </p:txBody>
       </p:sp>
       <p:sp>
         <p:nvSpPr>
@@ -6845,7 +7250,7 @@
           <a:bodyPr wrap="square" lIns="0" tIns="0" rIns="0" bIns="0" rtlCol="0" anchor="ctr"/>
           <a:lstStyle/>
           <a:p>
-            <a:pPr marL="0" indent="0">
+            <a:pPr indent="0" marL="0">
               <a:buNone/>
             </a:pPr>
             <a:r>
@@ -6889,13 +7294,6 @@
             <a:prstDash val="solid"/>
           </a:ln>
         </p:spPr>
-        <p:txBody>
-          <a:bodyPr/>
-          <a:lstStyle/>
-          <a:p>
-            <a:endParaRPr lang="ko-KR" altLang="en-US"/>
-          </a:p>
-        </p:txBody>
       </p:sp>
       <p:sp>
         <p:nvSpPr>
@@ -6921,13 +7319,6 @@
             <a:prstDash val="solid"/>
           </a:ln>
         </p:spPr>
-        <p:txBody>
-          <a:bodyPr/>
-          <a:lstStyle/>
-          <a:p>
-            <a:endParaRPr lang="ko-KR" altLang="en-US"/>
-          </a:p>
-        </p:txBody>
       </p:sp>
       <p:sp>
         <p:nvSpPr>
@@ -6950,7 +7341,7 @@
           <a:bodyPr wrap="square" lIns="0" tIns="0" rIns="0" bIns="0" rtlCol="0" anchor="ctr"/>
           <a:lstStyle/>
           <a:p>
-            <a:pPr marL="0" indent="0" algn="ctr">
+            <a:pPr algn="ctr" indent="0" marL="0">
               <a:buNone/>
             </a:pPr>
             <a:r>
@@ -6970,13 +7361,52 @@
       </p:sp>
       <p:sp>
         <p:nvSpPr>
+          <p:cNvPr id="7" name="Text 5"/>
+          <p:cNvSpPr/>
+          <p:nvPr/>
+        </p:nvSpPr>
+        <p:spPr>
+          <a:xfrm>
+            <a:off x="1673352" y="1810512"/>
+            <a:ext cx="9326880" cy="347472"/>
+          </a:xfrm>
+          <a:prstGeom prst="rect">
+            <a:avLst/>
+          </a:prstGeom>
+          <a:noFill/>
+          <a:ln/>
+        </p:spPr>
+        <p:txBody>
+          <a:bodyPr wrap="square" lIns="0" tIns="0" rIns="0" bIns="0" rtlCol="0" anchor="ctr"/>
+          <a:lstStyle/>
+          <a:p>
+            <a:pPr indent="0" marL="0">
+              <a:buNone/>
+            </a:pPr>
+            <a:r>
+              <a:rPr lang="en-US" sz="1650" b="1" dirty="0">
+                <a:solidFill>
+                  <a:srgbClr val="FFFFFF"/>
+                </a:solidFill>
+                <a:latin typeface="Malgun Gothic" pitchFamily="34" charset="0"/>
+                <a:ea typeface="Malgun Gothic" pitchFamily="34" charset="-122"/>
+                <a:cs typeface="Malgun Gothic" pitchFamily="34" charset="-120"/>
+              </a:rPr>
+              <a:t>정답 데이터부터 쌓는다</a:t>
+            </a:r>
+            <a:endParaRPr lang="en-US" sz="1650" dirty="0"/>
+          </a:p>
+        </p:txBody>
+      </p:sp>
+      <p:sp>
+        <p:nvSpPr>
           <p:cNvPr id="8" name="Text 6"/>
           <p:cNvSpPr/>
           <p:nvPr/>
         </p:nvSpPr>
         <p:spPr>
           <a:xfrm>
-            <a:off x="1673352" y="1995116"/>
+            <a:off x="1673352" y="2176272"/>
             <a:ext cx="9601200" cy="475488"/>
           </a:xfrm>
           <a:prstGeom prst="rect">
@@ -6989,14 +7419,14 @@
           <a:bodyPr wrap="square" lIns="0" tIns="0" rIns="0" bIns="0" rtlCol="0" anchor="ctr"/>
           <a:lstStyle/>
           <a:p>
-            <a:pPr marL="0" indent="0">
+            <a:pPr indent="0" marL="0">
               <a:lnSpc>
                 <a:spcPts val="1700"/>
               </a:lnSpc>
               <a:buNone/>
             </a:pPr>
             <a:r>
-              <a:rPr lang="en-US" sz="1600" dirty="0">
+              <a:rPr lang="en-US" sz="1250" dirty="0">
                 <a:solidFill>
                   <a:srgbClr val="CADCFC"/>
                 </a:solidFill>
@@ -7006,7 +7436,7 @@
               </a:rPr>
               <a:t>「후보 3개 모두 아님」을 담당자가 남길 수 있게 해서, AI가 틀린 경우를 기록으로 확보한다</a:t>
             </a:r>
-            <a:endParaRPr lang="en-US" sz="1600" dirty="0"/>
+            <a:endParaRPr lang="en-US" sz="1250" dirty="0"/>
           </a:p>
         </p:txBody>
       </p:sp>
@@ -7036,13 +7466,6 @@
             <a:prstDash val="solid"/>
           </a:ln>
         </p:spPr>
-        <p:txBody>
-          <a:bodyPr/>
-          <a:lstStyle/>
-          <a:p>
-            <a:endParaRPr lang="ko-KR" altLang="en-US"/>
-          </a:p>
-        </p:txBody>
       </p:sp>
       <p:sp>
         <p:nvSpPr>
@@ -7068,13 +7491,6 @@
             <a:prstDash val="solid"/>
           </a:ln>
         </p:spPr>
-        <p:txBody>
-          <a:bodyPr/>
-          <a:lstStyle/>
-          <a:p>
-            <a:endParaRPr lang="ko-KR" altLang="en-US"/>
-          </a:p>
-        </p:txBody>
       </p:sp>
       <p:sp>
         <p:nvSpPr>
@@ -7097,7 +7513,7 @@
           <a:bodyPr wrap="square" lIns="0" tIns="0" rIns="0" bIns="0" rtlCol="0" anchor="ctr"/>
           <a:lstStyle/>
           <a:p>
-            <a:pPr marL="0" indent="0" algn="ctr">
+            <a:pPr algn="ctr" indent="0" marL="0">
               <a:buNone/>
             </a:pPr>
             <a:r>
@@ -7117,13 +7533,52 @@
       </p:sp>
       <p:sp>
         <p:nvSpPr>
+          <p:cNvPr id="12" name="Text 10"/>
+          <p:cNvSpPr/>
+          <p:nvPr/>
+        </p:nvSpPr>
+        <p:spPr>
+          <a:xfrm>
+            <a:off x="1673352" y="3182112"/>
+            <a:ext cx="9326880" cy="347472"/>
+          </a:xfrm>
+          <a:prstGeom prst="rect">
+            <a:avLst/>
+          </a:prstGeom>
+          <a:noFill/>
+          <a:ln/>
+        </p:spPr>
+        <p:txBody>
+          <a:bodyPr wrap="square" lIns="0" tIns="0" rIns="0" bIns="0" rtlCol="0" anchor="ctr"/>
+          <a:lstStyle/>
+          <a:p>
+            <a:pPr indent="0" marL="0">
+              <a:buNone/>
+            </a:pPr>
+            <a:r>
+              <a:rPr lang="en-US" sz="1650" b="1" dirty="0">
+                <a:solidFill>
+                  <a:srgbClr val="FFFFFF"/>
+                </a:solidFill>
+                <a:latin typeface="Malgun Gothic" pitchFamily="34" charset="0"/>
+                <a:ea typeface="Malgun Gothic" pitchFamily="34" charset="-122"/>
+                <a:cs typeface="Malgun Gothic" pitchFamily="34" charset="-120"/>
+              </a:rPr>
+              <a:t>검색 방식을 의미 기반으로 바꾼다</a:t>
+            </a:r>
+            <a:endParaRPr lang="en-US" sz="1650" dirty="0"/>
+          </a:p>
+        </p:txBody>
+      </p:sp>
+      <p:sp>
+        <p:nvSpPr>
           <p:cNvPr id="13" name="Text 11"/>
           <p:cNvSpPr/>
           <p:nvPr/>
         </p:nvSpPr>
         <p:spPr>
           <a:xfrm>
-            <a:off x="1673352" y="3358085"/>
+            <a:off x="1673352" y="3547872"/>
             <a:ext cx="9601200" cy="475488"/>
           </a:xfrm>
           <a:prstGeom prst="rect">
@@ -7136,14 +7591,14 @@
           <a:bodyPr wrap="square" lIns="0" tIns="0" rIns="0" bIns="0" rtlCol="0" anchor="ctr"/>
           <a:lstStyle/>
           <a:p>
-            <a:pPr marL="0" indent="0">
+            <a:pPr indent="0" marL="0">
               <a:lnSpc>
                 <a:spcPts val="1700"/>
               </a:lnSpc>
               <a:buNone/>
             </a:pPr>
             <a:r>
-              <a:rPr lang="en-US" sz="1600" dirty="0" err="1">
+              <a:rPr lang="en-US" sz="1250" dirty="0">
                 <a:solidFill>
                   <a:srgbClr val="CADCFC"/>
                 </a:solidFill>
@@ -7151,86 +7606,9 @@
                 <a:ea typeface="Malgun Gothic" pitchFamily="34" charset="-122"/>
                 <a:cs typeface="Malgun Gothic" pitchFamily="34" charset="-120"/>
               </a:rPr>
-              <a:t>임베딩을</a:t>
-            </a:r>
-            <a:r>
-              <a:rPr lang="en-US" sz="1600" dirty="0">
-                <a:solidFill>
-                  <a:srgbClr val="CADCFC"/>
-                </a:solidFill>
-                <a:latin typeface="Malgun Gothic" pitchFamily="34" charset="0"/>
-                <a:ea typeface="Malgun Gothic" pitchFamily="34" charset="-122"/>
-                <a:cs typeface="Malgun Gothic" pitchFamily="34" charset="-120"/>
-              </a:rPr>
-              <a:t> 써서, 표현이 달라도 뜻이 비슷한 과거 사례를 </a:t>
-            </a:r>
-            <a:r>
-              <a:rPr lang="en-US" sz="1600" dirty="0" err="1">
-                <a:solidFill>
-                  <a:srgbClr val="CADCFC"/>
-                </a:solidFill>
-                <a:latin typeface="Malgun Gothic" pitchFamily="34" charset="0"/>
-                <a:ea typeface="Malgun Gothic" pitchFamily="34" charset="-122"/>
-                <a:cs typeface="Malgun Gothic" pitchFamily="34" charset="-120"/>
-              </a:rPr>
-              <a:t>찾도록</a:t>
-            </a:r>
-            <a:r>
-              <a:rPr lang="en-US" sz="1600" dirty="0">
-                <a:solidFill>
-                  <a:srgbClr val="CADCFC"/>
-                </a:solidFill>
-                <a:latin typeface="Malgun Gothic" pitchFamily="34" charset="0"/>
-                <a:ea typeface="Malgun Gothic" pitchFamily="34" charset="-122"/>
-                <a:cs typeface="Malgun Gothic" pitchFamily="34" charset="-120"/>
-              </a:rPr>
-              <a:t> </a:t>
-            </a:r>
-            <a:r>
-              <a:rPr lang="ko-KR" altLang="en-US" sz="1600" dirty="0">
-                <a:solidFill>
-                  <a:srgbClr val="CADCFC"/>
-                </a:solidFill>
-                <a:latin typeface="Malgun Gothic" pitchFamily="34" charset="0"/>
-                <a:ea typeface="Malgun Gothic" pitchFamily="34" charset="-122"/>
-                <a:cs typeface="Malgun Gothic" pitchFamily="34" charset="-120"/>
-              </a:rPr>
-              <a:t>의미 기반 </a:t>
-            </a:r>
-            <a:r>
-              <a:rPr lang="ko-KR" altLang="en-US" sz="1600" dirty="0" err="1">
-                <a:solidFill>
-                  <a:srgbClr val="CADCFC"/>
-                </a:solidFill>
-                <a:latin typeface="Malgun Gothic" pitchFamily="34" charset="0"/>
-                <a:ea typeface="Malgun Gothic" pitchFamily="34" charset="-122"/>
-                <a:cs typeface="Malgun Gothic" pitchFamily="34" charset="-120"/>
-              </a:rPr>
-              <a:t>추천를</a:t>
-            </a:r>
-            <a:r>
-              <a:rPr lang="ko-KR" altLang="en-US" sz="1600" dirty="0">
-                <a:solidFill>
-                  <a:srgbClr val="CADCFC"/>
-                </a:solidFill>
-                <a:latin typeface="Malgun Gothic" pitchFamily="34" charset="0"/>
-                <a:ea typeface="Malgun Gothic" pitchFamily="34" charset="-122"/>
-                <a:cs typeface="Malgun Gothic" pitchFamily="34" charset="-120"/>
-              </a:rPr>
-              <a:t> </a:t>
-            </a:r>
-            <a:r>
-              <a:rPr lang="en-US" sz="1600" dirty="0" err="1">
-                <a:solidFill>
-                  <a:srgbClr val="CADCFC"/>
-                </a:solidFill>
-                <a:latin typeface="Malgun Gothic" pitchFamily="34" charset="0"/>
-                <a:ea typeface="Malgun Gothic" pitchFamily="34" charset="-122"/>
-                <a:cs typeface="Malgun Gothic" pitchFamily="34" charset="-120"/>
-              </a:rPr>
-              <a:t>한다</a:t>
-            </a:r>
-            <a:endParaRPr lang="en-US" sz="1600" dirty="0"/>
+              <a:t>글자 겹침 대신 임베딩을 써서, 표현이 달라도 뜻이 비슷한 과거 사례를 찾도록 한다</a:t>
+            </a:r>
+            <a:endParaRPr lang="en-US" sz="1250" dirty="0"/>
           </a:p>
         </p:txBody>
       </p:sp>
@@ -7260,13 +7638,6 @@
             <a:prstDash val="solid"/>
           </a:ln>
         </p:spPr>
-        <p:txBody>
-          <a:bodyPr/>
-          <a:lstStyle/>
-          <a:p>
-            <a:endParaRPr lang="ko-KR" altLang="en-US"/>
-          </a:p>
-        </p:txBody>
       </p:sp>
       <p:sp>
         <p:nvSpPr>
@@ -7292,13 +7663,6 @@
             <a:prstDash val="solid"/>
           </a:ln>
         </p:spPr>
-        <p:txBody>
-          <a:bodyPr/>
-          <a:lstStyle/>
-          <a:p>
-            <a:endParaRPr lang="ko-KR" altLang="en-US"/>
-          </a:p>
-        </p:txBody>
       </p:sp>
       <p:sp>
         <p:nvSpPr>
@@ -7321,7 +7685,7 @@
           <a:bodyPr wrap="square" lIns="0" tIns="0" rIns="0" bIns="0" rtlCol="0" anchor="ctr"/>
           <a:lstStyle/>
           <a:p>
-            <a:pPr marL="0" indent="0" algn="ctr">
+            <a:pPr algn="ctr" indent="0" marL="0">
               <a:buNone/>
             </a:pPr>
             <a:r>
@@ -7341,13 +7705,52 @@
       </p:sp>
       <p:sp>
         <p:nvSpPr>
+          <p:cNvPr id="17" name="Text 15"/>
+          <p:cNvSpPr/>
+          <p:nvPr/>
+        </p:nvSpPr>
+        <p:spPr>
+          <a:xfrm>
+            <a:off x="1673352" y="4553712"/>
+            <a:ext cx="9326880" cy="347472"/>
+          </a:xfrm>
+          <a:prstGeom prst="rect">
+            <a:avLst/>
+          </a:prstGeom>
+          <a:noFill/>
+          <a:ln/>
+        </p:spPr>
+        <p:txBody>
+          <a:bodyPr wrap="square" lIns="0" tIns="0" rIns="0" bIns="0" rtlCol="0" anchor="ctr"/>
+          <a:lstStyle/>
+          <a:p>
+            <a:pPr indent="0" marL="0">
+              <a:buNone/>
+            </a:pPr>
+            <a:r>
+              <a:rPr lang="en-US" sz="1650" b="1" dirty="0">
+                <a:solidFill>
+                  <a:srgbClr val="FFFFFF"/>
+                </a:solidFill>
+                <a:latin typeface="Malgun Gothic" pitchFamily="34" charset="0"/>
+                <a:ea typeface="Malgun Gothic" pitchFamily="34" charset="-122"/>
+                <a:cs typeface="Malgun Gothic" pitchFamily="34" charset="-120"/>
+              </a:rPr>
+              <a:t>속도와 운영을 다듬는다</a:t>
+            </a:r>
+            <a:endParaRPr lang="en-US" sz="1650" dirty="0"/>
+          </a:p>
+        </p:txBody>
+      </p:sp>
+      <p:sp>
+        <p:nvSpPr>
           <p:cNvPr id="18" name="Text 16"/>
           <p:cNvSpPr/>
           <p:nvPr/>
         </p:nvSpPr>
         <p:spPr>
           <a:xfrm>
-            <a:off x="1673352" y="4729694"/>
+            <a:off x="1673352" y="4919472"/>
             <a:ext cx="9601200" cy="475488"/>
           </a:xfrm>
           <a:prstGeom prst="rect">
@@ -7360,14 +7763,14 @@
           <a:bodyPr wrap="square" lIns="0" tIns="0" rIns="0" bIns="0" rtlCol="0" anchor="ctr"/>
           <a:lstStyle/>
           <a:p>
-            <a:pPr marL="0" indent="0">
+            <a:pPr indent="0" marL="0">
               <a:lnSpc>
                 <a:spcPts val="1700"/>
               </a:lnSpc>
               <a:buNone/>
             </a:pPr>
             <a:r>
-              <a:rPr lang="en-US" sz="1600" dirty="0">
+              <a:rPr lang="en-US" sz="1250" dirty="0">
                 <a:solidFill>
                   <a:srgbClr val="CADCFC"/>
                 </a:solidFill>
@@ -7377,7 +7780,46 @@
               </a:rPr>
               <a:t>과거 자료를 미리 모아 두어 응답 시간을 줄이고, 로그인과 권한 관리를 붙인다</a:t>
             </a:r>
-            <a:endParaRPr lang="en-US" sz="1600" dirty="0"/>
+            <a:endParaRPr lang="en-US" sz="1250" dirty="0"/>
+          </a:p>
+        </p:txBody>
+      </p:sp>
+      <p:sp>
+        <p:nvSpPr>
+          <p:cNvPr id="19" name="Text 17"/>
+          <p:cNvSpPr/>
+          <p:nvPr/>
+        </p:nvSpPr>
+        <p:spPr>
+          <a:xfrm>
+            <a:off x="685800" y="5715000"/>
+            <a:ext cx="10789920" cy="457200"/>
+          </a:xfrm>
+          <a:prstGeom prst="rect">
+            <a:avLst/>
+          </a:prstGeom>
+          <a:noFill/>
+          <a:ln/>
+        </p:spPr>
+        <p:txBody>
+          <a:bodyPr wrap="square" lIns="0" tIns="0" rIns="0" bIns="0" rtlCol="0" anchor="ctr"/>
+          <a:lstStyle/>
+          <a:p>
+            <a:pPr indent="0" marL="0">
+              <a:buNone/>
+            </a:pPr>
+            <a:r>
+              <a:rPr lang="en-US" sz="1800" b="1" dirty="0">
+                <a:solidFill>
+                  <a:srgbClr val="FFFFFF"/>
+                </a:solidFill>
+                <a:latin typeface="Malgun Gothic" pitchFamily="34" charset="0"/>
+                <a:ea typeface="Malgun Gothic" pitchFamily="34" charset="-122"/>
+                <a:cs typeface="Malgun Gothic" pitchFamily="34" charset="-120"/>
+              </a:rPr>
+              <a:t>업무에서 느낀 불편을, 실제로 쓸 수 있는 도구로</a:t>
+            </a:r>
+            <a:endParaRPr lang="en-US" sz="1800" dirty="0"/>
           </a:p>
         </p:txBody>
       </p:sp>
@@ -7682,319 +8124,4 @@
     </a:ext>
   </a:extLst>
 </a:theme>
-</file>
-
-<file path=ppt/theme/theme2.xml><?xml version="1.0" encoding="utf-8"?>
-<a:theme xmlns:a="http://schemas.openxmlformats.org/drawingml/2006/main" name="Office 테마">
-  <a:themeElements>
-    <a:clrScheme name="Office">
-      <a:dk1>
-        <a:sysClr val="windowText" lastClr="000000"/>
-      </a:dk1>
-      <a:lt1>
-        <a:sysClr val="window" lastClr="FFFFFF"/>
-      </a:lt1>
-      <a:dk2>
-        <a:srgbClr val="0E2841"/>
-      </a:dk2>
-      <a:lt2>
-        <a:srgbClr val="E8E8E8"/>
-      </a:lt2>
-      <a:accent1>
-        <a:srgbClr val="156082"/>
-      </a:accent1>
-      <a:accent2>
-        <a:srgbClr val="E97132"/>
-      </a:accent2>
-      <a:accent3>
-        <a:srgbClr val="196B24"/>
-      </a:accent3>
-      <a:accent4>
-        <a:srgbClr val="0F9ED5"/>
-      </a:accent4>
-      <a:accent5>
-        <a:srgbClr val="A02B93"/>
-      </a:accent5>
-      <a:accent6>
-        <a:srgbClr val="4EA72E"/>
-      </a:accent6>
-      <a:hlink>
-        <a:srgbClr val="467886"/>
-      </a:hlink>
-      <a:folHlink>
-        <a:srgbClr val="96607D"/>
-      </a:folHlink>
-    </a:clrScheme>
-    <a:fontScheme name="Office">
-      <a:majorFont>
-        <a:latin typeface="맑은 고딕" panose="02110004020202020204"/>
-        <a:ea typeface=""/>
-        <a:cs typeface=""/>
-        <a:font script="Jpan" typeface="游ゴシック Light"/>
-        <a:font script="Hang" typeface="맑은 고딕"/>
-        <a:font script="Hans" typeface="等线 Light"/>
-        <a:font script="Hant" typeface="新細明體"/>
-        <a:font script="Arab" typeface="Times New Roman"/>
-        <a:font script="Hebr" typeface="Times New Roman"/>
-        <a:font script="Thai" typeface="Angsana New"/>
-        <a:font script="Ethi" typeface="Nyala"/>
-        <a:font script="Beng" typeface="Vrinda"/>
-        <a:font script="Gujr" typeface="Shruti"/>
-        <a:font script="Khmr" typeface="MoolBoran"/>
-        <a:font script="Knda" typeface="Tunga"/>
-        <a:font script="Guru" typeface="Raavi"/>
-        <a:font script="Cans" typeface="Euphemia"/>
-        <a:font script="Cher" typeface="Plantagenet Cherokee"/>
-        <a:font script="Yiii" typeface="Microsoft Yi Baiti"/>
-        <a:font script="Tibt" typeface="Microsoft Himalaya"/>
-        <a:font script="Thaa" typeface="MV Boli"/>
-        <a:font script="Deva" typeface="Mangal"/>
-        <a:font script="Telu" typeface="Gautami"/>
-        <a:font script="Taml" typeface="Latha"/>
-        <a:font script="Syrc" typeface="Estrangelo Edessa"/>
-        <a:font script="Orya" typeface="Kalinga"/>
-        <a:font script="Mlym" typeface="Kartika"/>
-        <a:font script="Laoo" typeface="DokChampa"/>
-        <a:font script="Sinh" typeface="Iskoola Pota"/>
-        <a:font script="Mong" typeface="Mongolian Baiti"/>
-        <a:font script="Viet" typeface="Times New Roman"/>
-        <a:font script="Uigh" typeface="Microsoft Uighur"/>
-        <a:font script="Geor" typeface="Sylfaen"/>
-        <a:font script="Armn" typeface="Arial"/>
-        <a:font script="Bugi" typeface="Leelawadee UI"/>
-        <a:font script="Bopo" typeface="Microsoft JhengHei"/>
-        <a:font script="Java" typeface="Javanese Text"/>
-        <a:font script="Lisu" typeface="Segoe UI"/>
-        <a:font script="Mymr" typeface="Myanmar Text"/>
-        <a:font script="Nkoo" typeface="Ebrima"/>
-        <a:font script="Olck" typeface="Nirmala UI"/>
-        <a:font script="Osma" typeface="Ebrima"/>
-        <a:font script="Phag" typeface="Phagspa"/>
-        <a:font script="Syrn" typeface="Estrangelo Edessa"/>
-        <a:font script="Syrj" typeface="Estrangelo Edessa"/>
-        <a:font script="Syre" typeface="Estrangelo Edessa"/>
-        <a:font script="Sora" typeface="Nirmala UI"/>
-        <a:font script="Tale" typeface="Microsoft Tai Le"/>
-        <a:font script="Talu" typeface="Microsoft New Tai Lue"/>
-        <a:font script="Tfng" typeface="Ebrima"/>
-      </a:majorFont>
-      <a:minorFont>
-        <a:latin typeface="맑은 고딕" panose="02110004020202020204"/>
-        <a:ea typeface=""/>
-        <a:cs typeface=""/>
-        <a:font script="Jpan" typeface="游ゴシック"/>
-        <a:font script="Hang" typeface="맑은 고딕"/>
-        <a:font script="Hans" typeface="等线"/>
-        <a:font script="Hant" typeface="新細明體"/>
-        <a:font script="Arab" typeface="Arial"/>
-        <a:font script="Hebr" typeface="Arial"/>
-        <a:font script="Thai" typeface="Cordia New"/>
-        <a:font script="Ethi" typeface="Nyala"/>
-        <a:font script="Beng" typeface="Vrinda"/>
-        <a:font script="Gujr" typeface="Shruti"/>
-        <a:font script="Khmr" typeface="DaunPenh"/>
-        <a:font script="Knda" typeface="Tunga"/>
-        <a:font script="Guru" typeface="Raavi"/>
-        <a:font script="Cans" typeface="Euphemia"/>
-        <a:font script="Cher" typeface="Plantagenet Cherokee"/>
-        <a:font script="Yiii" typeface="Microsoft Yi Baiti"/>
-        <a:font script="Tibt" typeface="Microsoft Himalaya"/>
-        <a:font script="Thaa" typeface="MV Boli"/>
-        <a:font script="Deva" typeface="Mangal"/>
-        <a:font script="Telu" typeface="Gautami"/>
-        <a:font script="Taml" typeface="Latha"/>
-        <a:font script="Syrc" typeface="Estrangelo Edessa"/>
-        <a:font script="Orya" typeface="Kalinga"/>
-        <a:font script="Mlym" typeface="Kartika"/>
-        <a:font script="Laoo" typeface="DokChampa"/>
-        <a:font script="Sinh" typeface="Iskoola Pota"/>
-        <a:font script="Mong" typeface="Mongolian Baiti"/>
-        <a:font script="Viet" typeface="Arial"/>
-        <a:font script="Uigh" typeface="Microsoft Uighur"/>
-        <a:font script="Geor" typeface="Sylfaen"/>
-        <a:font script="Armn" typeface="Arial"/>
-        <a:font script="Bugi" typeface="Leelawadee UI"/>
-        <a:font script="Bopo" typeface="Microsoft JhengHei"/>
-        <a:font script="Java" typeface="Javanese Text"/>
-        <a:font script="Lisu" typeface="Segoe UI"/>
-        <a:font script="Mymr" typeface="Myanmar Text"/>
-        <a:font script="Nkoo" typeface="Ebrima"/>
-        <a:font script="Olck" typeface="Nirmala UI"/>
-        <a:font script="Osma" typeface="Ebrima"/>
-        <a:font script="Phag" typeface="Phagspa"/>
-        <a:font script="Syrn" typeface="Estrangelo Edessa"/>
-        <a:font script="Syrj" typeface="Estrangelo Edessa"/>
-        <a:font script="Syre" typeface="Estrangelo Edessa"/>
-        <a:font script="Sora" typeface="Nirmala UI"/>
-        <a:font script="Tale" typeface="Microsoft Tai Le"/>
-        <a:font script="Talu" typeface="Microsoft New Tai Lue"/>
-        <a:font script="Tfng" typeface="Ebrima"/>
-      </a:minorFont>
-    </a:fontScheme>
-    <a:fmtScheme name="Office">
-      <a:fillStyleLst>
-        <a:solidFill>
-          <a:schemeClr val="phClr"/>
-        </a:solidFill>
-        <a:gradFill rotWithShape="1">
-          <a:gsLst>
-            <a:gs pos="0">
-              <a:schemeClr val="phClr">
-                <a:lumMod val="110000"/>
-                <a:satMod val="105000"/>
-                <a:tint val="67000"/>
-              </a:schemeClr>
-            </a:gs>
-            <a:gs pos="50000">
-              <a:schemeClr val="phClr">
-                <a:lumMod val="105000"/>
-                <a:satMod val="103000"/>
-                <a:tint val="73000"/>
-              </a:schemeClr>
-            </a:gs>
-            <a:gs pos="100000">
-              <a:schemeClr val="phClr">
-                <a:lumMod val="105000"/>
-                <a:satMod val="109000"/>
-                <a:tint val="81000"/>
-              </a:schemeClr>
-            </a:gs>
-          </a:gsLst>
-          <a:lin ang="5400000" scaled="0"/>
-        </a:gradFill>
-        <a:gradFill rotWithShape="1">
-          <a:gsLst>
-            <a:gs pos="0">
-              <a:schemeClr val="phClr">
-                <a:satMod val="103000"/>
-                <a:lumMod val="102000"/>
-                <a:tint val="94000"/>
-              </a:schemeClr>
-            </a:gs>
-            <a:gs pos="50000">
-              <a:schemeClr val="phClr">
-                <a:satMod val="110000"/>
-                <a:lumMod val="100000"/>
-                <a:shade val="100000"/>
-              </a:schemeClr>
-            </a:gs>
-            <a:gs pos="100000">
-              <a:schemeClr val="phClr">
-                <a:lumMod val="99000"/>
-                <a:satMod val="120000"/>
-                <a:shade val="78000"/>
-              </a:schemeClr>
-            </a:gs>
-          </a:gsLst>
-          <a:lin ang="5400000" scaled="0"/>
-        </a:gradFill>
-      </a:fillStyleLst>
-      <a:lnStyleLst>
-        <a:ln w="12700" cap="flat" cmpd="sng" algn="ctr">
-          <a:solidFill>
-            <a:schemeClr val="phClr"/>
-          </a:solidFill>
-          <a:prstDash val="solid"/>
-          <a:miter lim="800000"/>
-        </a:ln>
-        <a:ln w="19050" cap="flat" cmpd="sng" algn="ctr">
-          <a:solidFill>
-            <a:schemeClr val="phClr"/>
-          </a:solidFill>
-          <a:prstDash val="solid"/>
-          <a:miter lim="800000"/>
-        </a:ln>
-        <a:ln w="25400" cap="flat" cmpd="sng" algn="ctr">
-          <a:solidFill>
-            <a:schemeClr val="phClr"/>
-          </a:solidFill>
-          <a:prstDash val="solid"/>
-          <a:miter lim="800000"/>
-        </a:ln>
-      </a:lnStyleLst>
-      <a:effectStyleLst>
-        <a:effectStyle>
-          <a:effectLst/>
-        </a:effectStyle>
-        <a:effectStyle>
-          <a:effectLst/>
-        </a:effectStyle>
-        <a:effectStyle>
-          <a:effectLst>
-            <a:outerShdw blurRad="57150" dist="19050" dir="5400000" algn="ctr" rotWithShape="0">
-              <a:srgbClr val="000000">
-                <a:alpha val="63000"/>
-              </a:srgbClr>
-            </a:outerShdw>
-          </a:effectLst>
-        </a:effectStyle>
-      </a:effectStyleLst>
-      <a:bgFillStyleLst>
-        <a:solidFill>
-          <a:schemeClr val="phClr"/>
-        </a:solidFill>
-        <a:solidFill>
-          <a:schemeClr val="phClr">
-            <a:tint val="95000"/>
-            <a:satMod val="170000"/>
-          </a:schemeClr>
-        </a:solidFill>
-        <a:gradFill rotWithShape="1">
-          <a:gsLst>
-            <a:gs pos="0">
-              <a:schemeClr val="phClr">
-                <a:tint val="93000"/>
-                <a:satMod val="150000"/>
-                <a:shade val="98000"/>
-                <a:lumMod val="102000"/>
-              </a:schemeClr>
-            </a:gs>
-            <a:gs pos="50000">
-              <a:schemeClr val="phClr">
-                <a:tint val="98000"/>
-                <a:satMod val="130000"/>
-                <a:shade val="90000"/>
-                <a:lumMod val="103000"/>
-              </a:schemeClr>
-            </a:gs>
-            <a:gs pos="100000">
-              <a:schemeClr val="phClr">
-                <a:shade val="63000"/>
-                <a:satMod val="120000"/>
-              </a:schemeClr>
-            </a:gs>
-          </a:gsLst>
-          <a:lin ang="5400000" scaled="0"/>
-        </a:gradFill>
-      </a:bgFillStyleLst>
-    </a:fmtScheme>
-  </a:themeElements>
-  <a:objectDefaults>
-    <a:lnDef>
-      <a:spPr/>
-      <a:bodyPr/>
-      <a:lstStyle/>
-      <a:style>
-        <a:lnRef idx="2">
-          <a:schemeClr val="accent1"/>
-        </a:lnRef>
-        <a:fillRef idx="0">
-          <a:schemeClr val="accent1"/>
-        </a:fillRef>
-        <a:effectRef idx="1">
-          <a:schemeClr val="accent1"/>
-        </a:effectRef>
-        <a:fontRef idx="minor">
-          <a:schemeClr val="tx1"/>
-        </a:fontRef>
-      </a:style>
-    </a:lnDef>
-  </a:objectDefaults>
-  <a:extraClrSchemeLst/>
-  <a:extLst>
-    <a:ext uri="{05A4C25C-085E-4340-85A3-A5531E510DB2}">
-      <thm15:themeFamily xmlns:thm15="http://schemas.microsoft.com/office/thememl/2012/main" name="Office Theme" id="{2E142A2C-CD16-42D6-873A-C26D2A0506FA}" vid="{1BDDFF52-6CD6-40A5-AB3C-68EB2F1E4D0A}"/>
-    </a:ext>
-  </a:extLst>
-</a:theme>
 </file>